--- a/demo.pptx
+++ b/demo.pptx
@@ -3474,7 +3474,7 @@
               </a:defRPr>
             </a:pPr>
             <a:r>
-              <a:t>Same six params — YAML vs Zod</a:t>
+              <a:t>Entity model — YAML vs Zod</a:t>
             </a:r>
           </a:p>
         </p:txBody>
@@ -3573,175 +3573,29 @@
         </p:nvSpPr>
         <p:spPr>
           <a:xfrm>
-            <a:off x="548640" y="1280160"/>
-            <a:ext cx="5577840" cy="5212080"/>
+            <a:off x="548640" y="1188720"/>
+            <a:ext cx="10972800" cy="457200"/>
           </a:xfrm>
           <a:prstGeom prst="rect">
             <a:avLst/>
           </a:prstGeom>
-          <a:solidFill>
-            <a:srgbClr val="F4F6F8"/>
-          </a:solidFill>
-        </p:spPr>
-        <p:txBody>
-          <a:bodyPr wrap="square" lIns="137160" rIns="137160" tIns="91440" bIns="91440">
+          <a:noFill/>
+        </p:spPr>
+        <p:txBody>
+          <a:bodyPr wrap="none">
             <a:spAutoFit/>
           </a:bodyPr>
           <a:lstStyle/>
           <a:p>
             <a:pPr>
-              <a:defRPr sz="1300">
-                <a:solidFill>
-                  <a:srgbClr val="1B2631"/>
-                </a:solidFill>
-                <a:latin typeface="Consolas"/>
-              </a:defRPr>
-            </a:pPr>
-            <a:r>
-              <a:t># todos.model.mjs (JSDoc)</a:t>
-            </a:r>
-          </a:p>
-          <a:p>
-            <a:pPr>
-              <a:defRPr sz="1300">
-                <a:solidFill>
-                  <a:srgbClr val="1B2631"/>
-                </a:solidFill>
-                <a:latin typeface="Consolas"/>
-              </a:defRPr>
-            </a:pPr>
-            <a:r>
-              <a:t>- name: title</a:t>
-            </a:r>
-          </a:p>
-          <a:p>
-            <a:pPr>
-              <a:defRPr sz="1300">
-                <a:solidFill>
-                  <a:srgbClr val="1B2631"/>
-                </a:solidFill>
-                <a:latin typeface="Consolas"/>
-              </a:defRPr>
-            </a:pPr>
-            <a:r>
-              <a:t>  in: query</a:t>
-            </a:r>
-          </a:p>
-          <a:p>
-            <a:pPr>
-              <a:defRPr sz="1300">
-                <a:solidFill>
-                  <a:srgbClr val="1B2631"/>
-                </a:solidFill>
-                <a:latin typeface="Consolas"/>
-              </a:defRPr>
-            </a:pPr>
-            <a:r>
-              <a:t>  schema: { type: string }</a:t>
-            </a:r>
-          </a:p>
-          <a:p>
-            <a:pPr>
-              <a:defRPr sz="1300">
-                <a:solidFill>
-                  <a:srgbClr val="1B2631"/>
-                </a:solidFill>
-                <a:latin typeface="Consolas"/>
-              </a:defRPr>
-            </a:pPr>
-            <a:r>
-              <a:t>- name: titleMatchMode</a:t>
-            </a:r>
-          </a:p>
-          <a:p>
-            <a:pPr>
-              <a:defRPr sz="1300">
-                <a:solidFill>
-                  <a:srgbClr val="1B2631"/>
-                </a:solidFill>
-                <a:latin typeface="Consolas"/>
-              </a:defRPr>
-            </a:pPr>
-            <a:r>
-              <a:t>  in: query</a:t>
-            </a:r>
-          </a:p>
-          <a:p>
-            <a:pPr>
-              <a:defRPr sz="1300">
-                <a:solidFill>
-                  <a:srgbClr val="1B2631"/>
-                </a:solidFill>
-                <a:latin typeface="Consolas"/>
-              </a:defRPr>
-            </a:pPr>
-            <a:r>
-              <a:t>  schema:</a:t>
-            </a:r>
-          </a:p>
-          <a:p>
-            <a:pPr>
-              <a:defRPr sz="1300">
-                <a:solidFill>
-                  <a:srgbClr val="1B2631"/>
-                </a:solidFill>
-                <a:latin typeface="Consolas"/>
-              </a:defRPr>
-            </a:pPr>
-            <a:r>
-              <a:t>    type: string</a:t>
-            </a:r>
-          </a:p>
-          <a:p>
-            <a:pPr>
-              <a:defRPr sz="1300">
-                <a:solidFill>
-                  <a:srgbClr val="1B2631"/>
-                </a:solidFill>
-                <a:latin typeface="Consolas"/>
-              </a:defRPr>
-            </a:pPr>
-            <a:r>
-              <a:t>    enum: [contains, notContains,</a:t>
-            </a:r>
-          </a:p>
-          <a:p>
-            <a:pPr>
-              <a:defRPr sz="1300">
-                <a:solidFill>
-                  <a:srgbClr val="1B2631"/>
-                </a:solidFill>
-                <a:latin typeface="Consolas"/>
-              </a:defRPr>
-            </a:pPr>
-            <a:r>
-              <a:t>           startsWith, endsWith,</a:t>
-            </a:r>
-          </a:p>
-          <a:p>
-            <a:pPr>
-              <a:defRPr sz="1300">
-                <a:solidFill>
-                  <a:srgbClr val="1B2631"/>
-                </a:solidFill>
-                <a:latin typeface="Consolas"/>
-              </a:defRPr>
-            </a:pPr>
-            <a:r>
-              <a:t>           equals, notEquals]</a:t>
-            </a:r>
-          </a:p>
-          <a:p>
-            <a:pPr>
-              <a:defRPr sz="1300">
-                <a:solidFill>
-                  <a:srgbClr val="1B2631"/>
-                </a:solidFill>
-                <a:latin typeface="Consolas"/>
-              </a:defRPr>
-            </a:pPr>
-            <a:r>
-              <a:t># ... repeat per field x4</a:t>
+              <a:defRPr sz="1800">
+                <a:solidFill>
+                  <a:srgbClr val="556E80"/>
+                </a:solidFill>
+              </a:defRPr>
+            </a:pPr>
+            <a:r>
+              <a:t>Defining the Todo / Product object: how comfortable is the source to read and write?</a:t>
             </a:r>
           </a:p>
         </p:txBody>
@@ -3754,24 +3608,64 @@
         </p:nvSpPr>
         <p:spPr>
           <a:xfrm>
-            <a:off x="6263640" y="1280160"/>
-            <a:ext cx="5577840" cy="5212080"/>
+            <a:off x="548640" y="1783080"/>
+            <a:ext cx="5577840" cy="320040"/>
           </a:xfrm>
           <a:prstGeom prst="rect">
             <a:avLst/>
           </a:prstGeom>
-          <a:solidFill>
-            <a:srgbClr val="F4F6F8"/>
-          </a:solidFill>
-        </p:spPr>
-        <p:txBody>
-          <a:bodyPr wrap="square" lIns="137160" rIns="137160" tIns="91440" bIns="91440">
+          <a:noFill/>
+        </p:spPr>
+        <p:txBody>
+          <a:bodyPr wrap="none">
             <a:spAutoFit/>
           </a:bodyPr>
           <a:lstStyle/>
           <a:p>
             <a:pPr>
-              <a:defRPr sz="1300">
+              <a:defRPr sz="1400" b="1">
+                <a:solidFill>
+                  <a:srgbClr val="4C1D95"/>
+                </a:solidFill>
+              </a:defRPr>
+            </a:pPr>
+            <a:r>
+              <a:t>todos.model.mjs — YAML in JSDoc</a:t>
+            </a:r>
+          </a:p>
+        </p:txBody>
+      </p:sp>
+      <p:sp>
+        <p:nvSpPr>
+          <p:cNvPr id="7" name="TextBox 6"/>
+          <p:cNvSpPr txBox="1"/>
+          <p:nvPr/>
+        </p:nvSpPr>
+        <p:spPr>
+          <a:xfrm>
+            <a:off x="548640" y="2103120"/>
+            <a:ext cx="5577840" cy="4389120"/>
+          </a:xfrm>
+          <a:prstGeom prst="rect">
+            <a:avLst/>
+          </a:prstGeom>
+          <a:solidFill>
+            <a:srgbClr val="F5F3FF"/>
+          </a:solidFill>
+          <a:ln w="6350">
+            <a:solidFill>
+              <a:srgbClr val="A78BFA"/>
+            </a:solidFill>
+          </a:ln>
+        </p:spPr>
+        <p:txBody>
+          <a:bodyPr wrap="square" lIns="182880" rIns="137160" tIns="137160" bIns="91440">
+            <a:spAutoFit/>
+          </a:bodyPr>
+          <a:lstStyle/>
+          <a:p>
+            <a:pPr>
+              <a:defRPr sz="1200">
                 <a:solidFill>
                   <a:srgbClr val="1B2631"/>
                 </a:solidFill>
@@ -3779,12 +3673,12 @@
               </a:defRPr>
             </a:pPr>
             <a:r>
-              <a:t>// product.model.mjs (Zod)</a:t>
-            </a:r>
-          </a:p>
-          <a:p>
-            <a:pPr>
-              <a:defRPr sz="1300">
+              <a:t>/**</a:t>
+            </a:r>
+          </a:p>
+          <a:p>
+            <a:pPr>
+              <a:defRPr sz="1200">
                 <a:solidFill>
                   <a:srgbClr val="1B2631"/>
                 </a:solidFill>
@@ -3792,12 +3686,12 @@
               </a:defRPr>
             </a:pPr>
             <a:r>
-              <a:t>const MatchMode = z.enum([</a:t>
-            </a:r>
-          </a:p>
-          <a:p>
-            <a:pPr>
-              <a:defRPr sz="1300">
+              <a:t> * @openapi</a:t>
+            </a:r>
+          </a:p>
+          <a:p>
+            <a:pPr>
+              <a:defRPr sz="1200">
                 <a:solidFill>
                   <a:srgbClr val="1B2631"/>
                 </a:solidFill>
@@ -3805,12 +3699,12 @@
               </a:defRPr>
             </a:pPr>
             <a:r>
-              <a:t>  'contains', 'notContains',</a:t>
-            </a:r>
-          </a:p>
-          <a:p>
-            <a:pPr>
-              <a:defRPr sz="1300">
+              <a:t> * components:</a:t>
+            </a:r>
+          </a:p>
+          <a:p>
+            <a:pPr>
+              <a:defRPr sz="1200">
                 <a:solidFill>
                   <a:srgbClr val="1B2631"/>
                 </a:solidFill>
@@ -3818,12 +3712,12 @@
               </a:defRPr>
             </a:pPr>
             <a:r>
-              <a:t>  'startsWith', 'endsWith',</a:t>
-            </a:r>
-          </a:p>
-          <a:p>
-            <a:pPr>
-              <a:defRPr sz="1300">
+              <a:t> *   schemas:</a:t>
+            </a:r>
+          </a:p>
+          <a:p>
+            <a:pPr>
+              <a:defRPr sz="1200">
                 <a:solidFill>
                   <a:srgbClr val="1B2631"/>
                 </a:solidFill>
@@ -3831,12 +3725,12 @@
               </a:defRPr>
             </a:pPr>
             <a:r>
-              <a:t>  'equals', 'notEquals',</a:t>
-            </a:r>
-          </a:p>
-          <a:p>
-            <a:pPr>
-              <a:defRPr sz="1300">
+              <a:t> *     Todo:</a:t>
+            </a:r>
+          </a:p>
+          <a:p>
+            <a:pPr>
+              <a:defRPr sz="1200">
                 <a:solidFill>
                   <a:srgbClr val="1B2631"/>
                 </a:solidFill>
@@ -3844,22 +3738,25 @@
               </a:defRPr>
             </a:pPr>
             <a:r>
-              <a:t>]);</a:t>
-            </a:r>
-          </a:p>
-          <a:p>
-            <a:pPr>
-              <a:defRPr sz="1300">
+              <a:t> *       type: object</a:t>
+            </a:r>
+          </a:p>
+          <a:p>
+            <a:pPr>
+              <a:defRPr sz="1200">
                 <a:solidFill>
                   <a:srgbClr val="1B2631"/>
                 </a:solidFill>
                 <a:latin typeface="Consolas"/>
               </a:defRPr>
             </a:pPr>
-          </a:p>
-          <a:p>
-            <a:pPr>
-              <a:defRPr sz="1300">
+            <a:r>
+              <a:t> *       properties:</a:t>
+            </a:r>
+          </a:p>
+          <a:p>
+            <a:pPr>
+              <a:defRPr sz="1200">
                 <a:solidFill>
                   <a:srgbClr val="1B2631"/>
                 </a:solidFill>
@@ -3867,12 +3764,12 @@
               </a:defRPr>
             </a:pPr>
             <a:r>
-              <a:t>z.object({</a:t>
-            </a:r>
-          </a:p>
-          <a:p>
-            <a:pPr>
-              <a:defRPr sz="1300">
+              <a:t> *         id:       { type: integer }</a:t>
+            </a:r>
+          </a:p>
+          <a:p>
+            <a:pPr>
+              <a:defRPr sz="1200">
                 <a:solidFill>
                   <a:srgbClr val="1B2631"/>
                 </a:solidFill>
@@ -3880,12 +3777,12 @@
               </a:defRPr>
             </a:pPr>
             <a:r>
-              <a:t>  name: z.string().optional(),</a:t>
-            </a:r>
-          </a:p>
-          <a:p>
-            <a:pPr>
-              <a:defRPr sz="1300">
+              <a:t> *         title:    { type: string }</a:t>
+            </a:r>
+          </a:p>
+          <a:p>
+            <a:pPr>
+              <a:defRPr sz="1200">
                 <a:solidFill>
                   <a:srgbClr val="1B2631"/>
                 </a:solidFill>
@@ -3893,12 +3790,12 @@
               </a:defRPr>
             </a:pPr>
             <a:r>
-              <a:t>  nameMatchMode: MatchMode.optional(),</a:t>
-            </a:r>
-          </a:p>
-          <a:p>
-            <a:pPr>
-              <a:defRPr sz="1300">
+              <a:t> *         status:   { type: string }</a:t>
+            </a:r>
+          </a:p>
+          <a:p>
+            <a:pPr>
+              <a:defRPr sz="1200">
                 <a:solidFill>
                   <a:srgbClr val="1B2631"/>
                 </a:solidFill>
@@ -3906,12 +3803,12 @@
               </a:defRPr>
             </a:pPr>
             <a:r>
-              <a:t>  // ... description, category</a:t>
-            </a:r>
-          </a:p>
-          <a:p>
-            <a:pPr>
-              <a:defRPr sz="1300">
+              <a:t> *         priority: { type: string }</a:t>
+            </a:r>
+          </a:p>
+          <a:p>
+            <a:pPr>
+              <a:defRPr sz="1200">
                 <a:solidFill>
                   <a:srgbClr val="1B2631"/>
                 </a:solidFill>
@@ -3919,14 +3816,408 @@
               </a:defRPr>
             </a:pPr>
             <a:r>
+              <a:t> *         dueDate:  { type: string }</a:t>
+            </a:r>
+          </a:p>
+          <a:p>
+            <a:pPr>
+              <a:defRPr sz="1200">
+                <a:solidFill>
+                  <a:srgbClr val="1B2631"/>
+                </a:solidFill>
+                <a:latin typeface="Consolas"/>
+              </a:defRPr>
+            </a:pPr>
+            <a:r>
+              <a:t> *         tags:     { type: string }</a:t>
+            </a:r>
+          </a:p>
+          <a:p>
+            <a:pPr>
+              <a:defRPr sz="1200">
+                <a:solidFill>
+                  <a:srgbClr val="1B2631"/>
+                </a:solidFill>
+                <a:latin typeface="Consolas"/>
+              </a:defRPr>
+            </a:pPr>
+            <a:r>
+              <a:t> *       example:</a:t>
+            </a:r>
+          </a:p>
+          <a:p>
+            <a:pPr>
+              <a:defRPr sz="1200">
+                <a:solidFill>
+                  <a:srgbClr val="1B2631"/>
+                </a:solidFill>
+                <a:latin typeface="Consolas"/>
+              </a:defRPr>
+            </a:pPr>
+            <a:r>
+              <a:t> *         id: 1</a:t>
+            </a:r>
+          </a:p>
+          <a:p>
+            <a:pPr>
+              <a:defRPr sz="1200">
+                <a:solidFill>
+                  <a:srgbClr val="1B2631"/>
+                </a:solidFill>
+                <a:latin typeface="Consolas"/>
+              </a:defRPr>
+            </a:pPr>
+            <a:r>
+              <a:t> *         title: "Task 1"</a:t>
+            </a:r>
+          </a:p>
+          <a:p>
+            <a:pPr>
+              <a:defRPr sz="1200">
+                <a:solidFill>
+                  <a:srgbClr val="1B2631"/>
+                </a:solidFill>
+                <a:latin typeface="Consolas"/>
+              </a:defRPr>
+            </a:pPr>
+            <a:r>
+              <a:t> *         status: In-Progress</a:t>
+            </a:r>
+          </a:p>
+          <a:p>
+            <a:pPr>
+              <a:defRPr sz="1200">
+                <a:solidFill>
+                  <a:srgbClr val="1B2631"/>
+                </a:solidFill>
+                <a:latin typeface="Consolas"/>
+              </a:defRPr>
+            </a:pPr>
+            <a:r>
+              <a:t> */</a:t>
+            </a:r>
+          </a:p>
+          <a:p>
+            <a:pPr>
+              <a:defRPr sz="1200">
+                <a:solidFill>
+                  <a:srgbClr val="1B2631"/>
+                </a:solidFill>
+                <a:latin typeface="Consolas"/>
+              </a:defRPr>
+            </a:pPr>
+          </a:p>
+          <a:p>
+            <a:pPr>
+              <a:defRPr sz="1200">
+                <a:solidFill>
+                  <a:srgbClr val="1B2631"/>
+                </a:solidFill>
+                <a:latin typeface="Consolas"/>
+              </a:defRPr>
+            </a:pPr>
+            <a:r>
+              <a:t>// YAML inside a comment.</a:t>
+            </a:r>
+          </a:p>
+          <a:p>
+            <a:pPr>
+              <a:defRPr sz="1200">
+                <a:solidFill>
+                  <a:srgbClr val="1B2631"/>
+                </a:solidFill>
+                <a:latin typeface="Consolas"/>
+              </a:defRPr>
+            </a:pPr>
+            <a:r>
+              <a:t>// Indentation matters; editor doesn't help.</a:t>
+            </a:r>
+          </a:p>
+        </p:txBody>
+      </p:sp>
+      <p:sp>
+        <p:nvSpPr>
+          <p:cNvPr id="8" name="TextBox 7"/>
+          <p:cNvSpPr txBox="1"/>
+          <p:nvPr/>
+        </p:nvSpPr>
+        <p:spPr>
+          <a:xfrm>
+            <a:off x="6263640" y="1783080"/>
+            <a:ext cx="5577840" cy="320040"/>
+          </a:xfrm>
+          <a:prstGeom prst="rect">
+            <a:avLst/>
+          </a:prstGeom>
+          <a:noFill/>
+        </p:spPr>
+        <p:txBody>
+          <a:bodyPr wrap="none">
+            <a:spAutoFit/>
+          </a:bodyPr>
+          <a:lstStyle/>
+          <a:p>
+            <a:pPr>
+              <a:defRPr sz="1400" b="1">
+                <a:solidFill>
+                  <a:srgbClr val="4C1D95"/>
+                </a:solidFill>
+              </a:defRPr>
+            </a:pPr>
+            <a:r>
+              <a:t>product.model.mjs — Zod schema</a:t>
+            </a:r>
+          </a:p>
+        </p:txBody>
+      </p:sp>
+      <p:sp>
+        <p:nvSpPr>
+          <p:cNvPr id="9" name="TextBox 8"/>
+          <p:cNvSpPr txBox="1"/>
+          <p:nvPr/>
+        </p:nvSpPr>
+        <p:spPr>
+          <a:xfrm>
+            <a:off x="6263640" y="2103120"/>
+            <a:ext cx="5577840" cy="4389120"/>
+          </a:xfrm>
+          <a:prstGeom prst="rect">
+            <a:avLst/>
+          </a:prstGeom>
+          <a:solidFill>
+            <a:srgbClr val="F5F3FF"/>
+          </a:solidFill>
+          <a:ln w="6350">
+            <a:solidFill>
+              <a:srgbClr val="A78BFA"/>
+            </a:solidFill>
+          </a:ln>
+        </p:spPr>
+        <p:txBody>
+          <a:bodyPr wrap="square" lIns="182880" rIns="137160" tIns="137160" bIns="91440">
+            <a:spAutoFit/>
+          </a:bodyPr>
+          <a:lstStyle/>
+          <a:p>
+            <a:pPr>
+              <a:defRPr sz="1200">
+                <a:solidFill>
+                  <a:srgbClr val="1B2631"/>
+                </a:solidFill>
+                <a:latin typeface="Consolas"/>
+              </a:defRPr>
+            </a:pPr>
+            <a:r>
+              <a:t>import { z } from 'zod';</a:t>
+            </a:r>
+          </a:p>
+          <a:p>
+            <a:pPr>
+              <a:defRPr sz="1200">
+                <a:solidFill>
+                  <a:srgbClr val="1B2631"/>
+                </a:solidFill>
+                <a:latin typeface="Consolas"/>
+              </a:defRPr>
+            </a:pPr>
+          </a:p>
+          <a:p>
+            <a:pPr>
+              <a:defRPr sz="1200">
+                <a:solidFill>
+                  <a:srgbClr val="1B2631"/>
+                </a:solidFill>
+                <a:latin typeface="Consolas"/>
+              </a:defRPr>
+            </a:pPr>
+            <a:r>
+              <a:t>export const Product = z.object({</a:t>
+            </a:r>
+          </a:p>
+          <a:p>
+            <a:pPr>
+              <a:defRPr sz="1200">
+                <a:solidFill>
+                  <a:srgbClr val="1B2631"/>
+                </a:solidFill>
+                <a:latin typeface="Consolas"/>
+              </a:defRPr>
+            </a:pPr>
+            <a:r>
+              <a:t>  id:          z.number().int(),</a:t>
+            </a:r>
+          </a:p>
+          <a:p>
+            <a:pPr>
+              <a:defRPr sz="1200">
+                <a:solidFill>
+                  <a:srgbClr val="1B2631"/>
+                </a:solidFill>
+                <a:latin typeface="Consolas"/>
+              </a:defRPr>
+            </a:pPr>
+            <a:r>
+              <a:t>  name:        z.string(),</a:t>
+            </a:r>
+          </a:p>
+          <a:p>
+            <a:pPr>
+              <a:defRPr sz="1200">
+                <a:solidFill>
+                  <a:srgbClr val="1B2631"/>
+                </a:solidFill>
+                <a:latin typeface="Consolas"/>
+              </a:defRPr>
+            </a:pPr>
+            <a:r>
+              <a:t>  description: z.string(),</a:t>
+            </a:r>
+          </a:p>
+          <a:p>
+            <a:pPr>
+              <a:defRPr sz="1200">
+                <a:solidFill>
+                  <a:srgbClr val="1B2631"/>
+                </a:solidFill>
+                <a:latin typeface="Consolas"/>
+              </a:defRPr>
+            </a:pPr>
+            <a:r>
+              <a:t>  price:       z.number(),</a:t>
+            </a:r>
+          </a:p>
+          <a:p>
+            <a:pPr>
+              <a:defRPr sz="1200">
+                <a:solidFill>
+                  <a:srgbClr val="1B2631"/>
+                </a:solidFill>
+                <a:latin typeface="Consolas"/>
+              </a:defRPr>
+            </a:pPr>
+            <a:r>
+              <a:t>  stock:       z.number().int(),</a:t>
+            </a:r>
+          </a:p>
+          <a:p>
+            <a:pPr>
+              <a:defRPr sz="1200">
+                <a:solidFill>
+                  <a:srgbClr val="1B2631"/>
+                </a:solidFill>
+                <a:latin typeface="Consolas"/>
+              </a:defRPr>
+            </a:pPr>
+            <a:r>
+              <a:t>  category:    z.string(),</a:t>
+            </a:r>
+          </a:p>
+          <a:p>
+            <a:pPr>
+              <a:defRPr sz="1200">
+                <a:solidFill>
+                  <a:srgbClr val="1B2631"/>
+                </a:solidFill>
+                <a:latin typeface="Consolas"/>
+              </a:defRPr>
+            </a:pPr>
+            <a:r>
+              <a:t>}).openapi('Product', {</a:t>
+            </a:r>
+          </a:p>
+          <a:p>
+            <a:pPr>
+              <a:defRPr sz="1200">
+                <a:solidFill>
+                  <a:srgbClr val="1B2631"/>
+                </a:solidFill>
+                <a:latin typeface="Consolas"/>
+              </a:defRPr>
+            </a:pPr>
+            <a:r>
+              <a:t>  example: { id: 1, name: 'Wireless Earbuds',</a:t>
+            </a:r>
+          </a:p>
+          <a:p>
+            <a:pPr>
+              <a:defRPr sz="1200">
+                <a:solidFill>
+                  <a:srgbClr val="1B2631"/>
+                </a:solidFill>
+                <a:latin typeface="Consolas"/>
+              </a:defRPr>
+            </a:pPr>
+            <a:r>
+              <a:t>             price: 19.99, stock: 42 },</a:t>
+            </a:r>
+          </a:p>
+          <a:p>
+            <a:pPr>
+              <a:defRPr sz="1200">
+                <a:solidFill>
+                  <a:srgbClr val="1B2631"/>
+                </a:solidFill>
+                <a:latin typeface="Consolas"/>
+              </a:defRPr>
+            </a:pPr>
+            <a:r>
               <a:t>});</a:t>
             </a:r>
           </a:p>
-        </p:txBody>
-      </p:sp>
-      <p:sp>
-        <p:nvSpPr>
-          <p:cNvPr id="7" name="Rectangle 6"/>
+          <a:p>
+            <a:pPr>
+              <a:defRPr sz="1200">
+                <a:solidFill>
+                  <a:srgbClr val="1B2631"/>
+                </a:solidFill>
+                <a:latin typeface="Consolas"/>
+              </a:defRPr>
+            </a:pPr>
+          </a:p>
+          <a:p>
+            <a:pPr>
+              <a:defRPr sz="1200">
+                <a:solidFill>
+                  <a:srgbClr val="1B2631"/>
+                </a:solidFill>
+                <a:latin typeface="Consolas"/>
+              </a:defRPr>
+            </a:pPr>
+            <a:r>
+              <a:t>// Plain JS object.</a:t>
+            </a:r>
+          </a:p>
+          <a:p>
+            <a:pPr>
+              <a:defRPr sz="1200">
+                <a:solidFill>
+                  <a:srgbClr val="1B2631"/>
+                </a:solidFill>
+                <a:latin typeface="Consolas"/>
+              </a:defRPr>
+            </a:pPr>
+            <a:r>
+              <a:t>// Linter/editor catch typos.</a:t>
+            </a:r>
+          </a:p>
+          <a:p>
+            <a:pPr>
+              <a:defRPr sz="1200">
+                <a:solidFill>
+                  <a:srgbClr val="1B2631"/>
+                </a:solidFill>
+                <a:latin typeface="Consolas"/>
+              </a:defRPr>
+            </a:pPr>
+            <a:r>
+              <a:t>// Easy to read, easy to write.</a:t>
+            </a:r>
+          </a:p>
+        </p:txBody>
+      </p:sp>
+      <p:sp>
+        <p:nvSpPr>
+          <p:cNvPr id="10" name="Rectangle 9"/>
           <p:cNvSpPr/>
           <p:nvPr/>
         </p:nvSpPr>
@@ -3969,7 +4260,7 @@
       </p:sp>
       <p:sp>
         <p:nvSpPr>
-          <p:cNvPr id="8" name="Right Triangle 7"/>
+          <p:cNvPr id="11" name="Right Triangle 10"/>
           <p:cNvSpPr/>
           <p:nvPr/>
         </p:nvSpPr>
@@ -4012,7 +4303,7 @@
       </p:sp>
       <p:sp>
         <p:nvSpPr>
-          <p:cNvPr id="9" name="TextBox 8"/>
+          <p:cNvPr id="12" name="TextBox 11"/>
           <p:cNvSpPr txBox="1"/>
           <p:nvPr/>
         </p:nvSpPr>
@@ -4047,7 +4338,7 @@
       </p:sp>
       <p:sp>
         <p:nvSpPr>
-          <p:cNvPr id="10" name="Rectangle 9"/>
+          <p:cNvPr id="13" name="Rectangle 12"/>
           <p:cNvSpPr/>
           <p:nvPr/>
         </p:nvSpPr>
@@ -5037,7 +5328,7 @@
               </a:defRPr>
             </a:pPr>
             <a:r>
-              <a:t>Server — Express 5, Node 24 (--watch, --env-file)</a:t>
+              <a:t>Server — Express 4, Node 24 (--watch, --env-file)</a:t>
             </a:r>
           </a:p>
           <a:p>
@@ -5082,52 +5373,7 @@
               </a:defRPr>
             </a:pPr>
             <a:r>
-              <a:t>Database — postgres.js with safe tagged-template SQL</a:t>
-            </a:r>
-          </a:p>
-          <a:p>
-            <a:pPr>
-              <a:spcAft>
-                <a:spcPts val="800"/>
-              </a:spcAft>
-              <a:defRPr sz="2000">
-                <a:solidFill>
-                  <a:srgbClr val="1B2631"/>
-                </a:solidFill>
-              </a:defRPr>
-            </a:pPr>
-            <a:r>
-              <a:t>Schema introspection — drizzle-kit (db:pull)</a:t>
-            </a:r>
-          </a:p>
-          <a:p>
-            <a:pPr>
-              <a:spcAft>
-                <a:spcPts val="800"/>
-              </a:spcAft>
-              <a:defRPr sz="2000">
-                <a:solidFill>
-                  <a:srgbClr val="1B2631"/>
-                </a:solidFill>
-              </a:defRPr>
-            </a:pPr>
-            <a:r>
               <a:t>OpenAPI — swagger-jsdoc (YAML) and @asteasolutions/zod-to-openapi (Zod)</a:t>
-            </a:r>
-          </a:p>
-          <a:p>
-            <a:pPr>
-              <a:spcAft>
-                <a:spcPts val="800"/>
-              </a:spcAft>
-              <a:defRPr sz="2000">
-                <a:solidFill>
-                  <a:srgbClr val="1B2631"/>
-                </a:solidFill>
-              </a:defRPr>
-            </a:pPr>
-            <a:r>
-              <a:t>Tooling — npm workspaces, concurrently, single root install</a:t>
             </a:r>
           </a:p>
         </p:txBody>
@@ -5551,7 +5797,7 @@
               </a:defRPr>
             </a:pPr>
             <a:r>
-              <a:t>│   ├── routes/              # /todos, /products</a:t>
+              <a:t>│   ├── routes/              # /todos, /products  (Express 4)</a:t>
             </a:r>
           </a:p>
           <a:p>
@@ -6052,7 +6298,7 @@
               </a:defRPr>
             </a:pPr>
             <a:r>
-              <a:t>Client paging — /todos</a:t>
+              <a:t>Client paging — /todos-client</a:t>
             </a:r>
           </a:p>
           <a:p>
@@ -8151,7 +8397,7 @@
               </a:defRPr>
             </a:pPr>
             <a:r>
-              <a:t>Pure text. No type checking. Easy to drift from the code.</a:t>
+              <a:t>Pure text inside /** */ blocks. Indentation matters; one wrong space silently breaks the spec.</a:t>
             </a:r>
           </a:p>
           <a:p>
@@ -8166,7 +8412,7 @@
               </a:defRPr>
             </a:pPr>
             <a:r>
-              <a:t>Adding 6 filter params: ~36 lines of indented YAML, copy/paste duplication.</a:t>
+              <a:t>Editor offers no help — typos in property names just disappear from the output.</a:t>
             </a:r>
           </a:p>
           <a:p>
@@ -8208,7 +8454,7 @@
               </a:defRPr>
             </a:pPr>
             <a:r>
-              <a:t>Real JS values. Refactor-safe. Same schema can validate req.query at runtime.</a:t>
+              <a:t>Plain JS objects. No indentation rules. Your existing linter and editor catch typos.</a:t>
             </a:r>
           </a:p>
           <a:p>
@@ -8223,7 +8469,7 @@
               </a:defRPr>
             </a:pPr>
             <a:r>
-              <a:t>Adding 6 filter params: 6 lines, sharing one MatchMode = z.enum([...]).</a:t>
+              <a:t>Reuse: one MatchMode = z.enum([...]) shared across every filter field.</a:t>
             </a:r>
           </a:p>
           <a:p>
@@ -8250,7 +8496,7 @@
               </a:defRPr>
             </a:pPr>
             <a:r>
-              <a:t>Both feed the same Swagger UI — diff is in maintainability, not in the docs that ship.</a:t>
+              <a:t>Both feed the same Swagger UI — diff is in how comfortable the source is to read and write.</a:t>
             </a:r>
           </a:p>
         </p:txBody>

--- a/demo.pptx
+++ b/demo.pptx
@@ -5,19 +5,19 @@
     <p:sldMasterId id="2147483648" r:id="rId1"/>
   </p:sldMasterIdLst>
   <p:sldIdLst>
-    <p:sldId id="256" r:id="rId7"/>
-    <p:sldId id="257" r:id="rId8"/>
-    <p:sldId id="258" r:id="rId9"/>
-    <p:sldId id="259" r:id="rId10"/>
-    <p:sldId id="260" r:id="rId11"/>
-    <p:sldId id="261" r:id="rId12"/>
-    <p:sldId id="262" r:id="rId13"/>
-    <p:sldId id="263" r:id="rId14"/>
-    <p:sldId id="264" r:id="rId15"/>
-    <p:sldId id="265" r:id="rId16"/>
-    <p:sldId id="266" r:id="rId17"/>
+    <p:sldId id="256" r:id="rId2"/>
+    <p:sldId id="257" r:id="rId3"/>
+    <p:sldId id="258" r:id="rId4"/>
+    <p:sldId id="259" r:id="rId5"/>
+    <p:sldId id="260" r:id="rId6"/>
+    <p:sldId id="261" r:id="rId7"/>
+    <p:sldId id="262" r:id="rId8"/>
+    <p:sldId id="263" r:id="rId9"/>
+    <p:sldId id="264" r:id="rId10"/>
+    <p:sldId id="265" r:id="rId11"/>
+    <p:sldId id="266" r:id="rId12"/>
   </p:sldIdLst>
-  <p:sldSz cx="12191695" cy="6858000" type="screen4x3"/>
+  <p:sldSz cx="12192000" cy="6858000"/>
   <p:notesSz cx="6858000" cy="9144000"/>
   <p:defaultTextStyle>
     <a:defPPr>
@@ -114,6 +114,22 @@
       </a:defRPr>
     </a:lvl9pPr>
   </p:defaultTextStyle>
+  <p:extLst>
+    <p:ext uri="{EFAFB233-063F-42B5-8137-9DF3F51BA10A}">
+      <p15:sldGuideLst xmlns:p15="http://schemas.microsoft.com/office/powerpoint/2012/main">
+        <p15:guide id="1" orient="horz" pos="2160">
+          <p15:clr>
+            <a:srgbClr val="A4A3A4"/>
+          </p15:clr>
+        </p15:guide>
+        <p15:guide id="2" pos="2880">
+          <p15:clr>
+            <a:srgbClr val="A4A3A4"/>
+          </p15:clr>
+        </p15:guide>
+      </p15:sldGuideLst>
+    </p:ext>
+  </p:extLst>
 </p:presentation>
 </file>
 
@@ -155,10 +171,9 @@
           <a:lstStyle/>
           <a:p>
             <a:r>
-              <a:rPr lang="en-US" smtClean="0"/>
+              <a:rPr lang="en-US"/>
               <a:t>Click to edit Master title style</a:t>
             </a:r>
-            <a:endParaRPr lang="en-US"/>
           </a:p>
         </p:txBody>
       </p:sp>
@@ -274,10 +289,9 @@
           </a:lstStyle>
           <a:p>
             <a:r>
-              <a:rPr lang="en-US" smtClean="0"/>
+              <a:rPr lang="en-US"/>
               <a:t>Click to edit Master subtitle style</a:t>
             </a:r>
-            <a:endParaRPr lang="en-US"/>
           </a:p>
         </p:txBody>
       </p:sp>
@@ -298,7 +312,7 @@
           <a:p>
             <a:fld id="{5BCAD085-E8A6-8845-BD4E-CB4CCA059FC4}" type="datetimeFigureOut">
               <a:rPr lang="en-US" smtClean="0"/>
-              <a:t>1/27/13</a:t>
+              <a:t>5/7/2026</a:t>
             </a:fld>
             <a:endParaRPr lang="en-US"/>
           </a:p>
@@ -392,10 +406,9 @@
           <a:lstStyle/>
           <a:p>
             <a:r>
-              <a:rPr lang="en-US" smtClean="0"/>
+              <a:rPr lang="en-US"/>
               <a:t>Click to edit Master title style</a:t>
             </a:r>
-            <a:endParaRPr lang="en-US"/>
           </a:p>
         </p:txBody>
       </p:sp>
@@ -416,38 +429,37 @@
           <a:p>
             <a:pPr lvl="0"/>
             <a:r>
-              <a:rPr lang="en-US" smtClean="0"/>
+              <a:rPr lang="en-US"/>
               <a:t>Click to edit Master text styles</a:t>
             </a:r>
           </a:p>
           <a:p>
             <a:pPr lvl="1"/>
             <a:r>
-              <a:rPr lang="en-US" smtClean="0"/>
+              <a:rPr lang="en-US"/>
               <a:t>Second level</a:t>
             </a:r>
           </a:p>
           <a:p>
             <a:pPr lvl="2"/>
             <a:r>
-              <a:rPr lang="en-US" smtClean="0"/>
+              <a:rPr lang="en-US"/>
               <a:t>Third level</a:t>
             </a:r>
           </a:p>
           <a:p>
             <a:pPr lvl="3"/>
             <a:r>
-              <a:rPr lang="en-US" smtClean="0"/>
+              <a:rPr lang="en-US"/>
               <a:t>Fourth level</a:t>
             </a:r>
           </a:p>
           <a:p>
             <a:pPr lvl="4"/>
             <a:r>
-              <a:rPr lang="en-US" smtClean="0"/>
+              <a:rPr lang="en-US"/>
               <a:t>Fifth level</a:t>
             </a:r>
-            <a:endParaRPr lang="en-US"/>
           </a:p>
         </p:txBody>
       </p:sp>
@@ -468,7 +480,7 @@
           <a:p>
             <a:fld id="{5BCAD085-E8A6-8845-BD4E-CB4CCA059FC4}" type="datetimeFigureOut">
               <a:rPr lang="en-US" smtClean="0"/>
-              <a:t>1/27/13</a:t>
+              <a:t>5/7/2026</a:t>
             </a:fld>
             <a:endParaRPr lang="en-US"/>
           </a:p>
@@ -567,10 +579,9 @@
           <a:lstStyle/>
           <a:p>
             <a:r>
-              <a:rPr lang="en-US" smtClean="0"/>
+              <a:rPr lang="en-US"/>
               <a:t>Click to edit Master title style</a:t>
             </a:r>
-            <a:endParaRPr lang="en-US"/>
           </a:p>
         </p:txBody>
       </p:sp>
@@ -596,38 +607,37 @@
           <a:p>
             <a:pPr lvl="0"/>
             <a:r>
-              <a:rPr lang="en-US" smtClean="0"/>
+              <a:rPr lang="en-US"/>
               <a:t>Click to edit Master text styles</a:t>
             </a:r>
           </a:p>
           <a:p>
             <a:pPr lvl="1"/>
             <a:r>
-              <a:rPr lang="en-US" smtClean="0"/>
+              <a:rPr lang="en-US"/>
               <a:t>Second level</a:t>
             </a:r>
           </a:p>
           <a:p>
             <a:pPr lvl="2"/>
             <a:r>
-              <a:rPr lang="en-US" smtClean="0"/>
+              <a:rPr lang="en-US"/>
               <a:t>Third level</a:t>
             </a:r>
           </a:p>
           <a:p>
             <a:pPr lvl="3"/>
             <a:r>
-              <a:rPr lang="en-US" smtClean="0"/>
+              <a:rPr lang="en-US"/>
               <a:t>Fourth level</a:t>
             </a:r>
           </a:p>
           <a:p>
             <a:pPr lvl="4"/>
             <a:r>
-              <a:rPr lang="en-US" smtClean="0"/>
+              <a:rPr lang="en-US"/>
               <a:t>Fifth level</a:t>
             </a:r>
-            <a:endParaRPr lang="en-US"/>
           </a:p>
         </p:txBody>
       </p:sp>
@@ -648,7 +658,7 @@
           <a:p>
             <a:fld id="{5BCAD085-E8A6-8845-BD4E-CB4CCA059FC4}" type="datetimeFigureOut">
               <a:rPr lang="en-US" smtClean="0"/>
-              <a:t>1/27/13</a:t>
+              <a:t>5/7/2026</a:t>
             </a:fld>
             <a:endParaRPr lang="en-US"/>
           </a:p>
@@ -742,10 +752,9 @@
           <a:lstStyle/>
           <a:p>
             <a:r>
-              <a:rPr lang="en-US" smtClean="0"/>
+              <a:rPr lang="en-US"/>
               <a:t>Click to edit Master title style</a:t>
             </a:r>
-            <a:endParaRPr lang="en-US"/>
           </a:p>
         </p:txBody>
       </p:sp>
@@ -766,38 +775,37 @@
           <a:p>
             <a:pPr lvl="0"/>
             <a:r>
-              <a:rPr lang="en-US" smtClean="0"/>
+              <a:rPr lang="en-US"/>
               <a:t>Click to edit Master text styles</a:t>
             </a:r>
           </a:p>
           <a:p>
             <a:pPr lvl="1"/>
             <a:r>
-              <a:rPr lang="en-US" smtClean="0"/>
+              <a:rPr lang="en-US"/>
               <a:t>Second level</a:t>
             </a:r>
           </a:p>
           <a:p>
             <a:pPr lvl="2"/>
             <a:r>
-              <a:rPr lang="en-US" smtClean="0"/>
+              <a:rPr lang="en-US"/>
               <a:t>Third level</a:t>
             </a:r>
           </a:p>
           <a:p>
             <a:pPr lvl="3"/>
             <a:r>
-              <a:rPr lang="en-US" smtClean="0"/>
+              <a:rPr lang="en-US"/>
               <a:t>Fourth level</a:t>
             </a:r>
           </a:p>
           <a:p>
             <a:pPr lvl="4"/>
             <a:r>
-              <a:rPr lang="en-US" smtClean="0"/>
+              <a:rPr lang="en-US"/>
               <a:t>Fifth level</a:t>
             </a:r>
-            <a:endParaRPr lang="en-US"/>
           </a:p>
         </p:txBody>
       </p:sp>
@@ -818,7 +826,7 @@
           <a:p>
             <a:fld id="{5BCAD085-E8A6-8845-BD4E-CB4CCA059FC4}" type="datetimeFigureOut">
               <a:rPr lang="en-US" smtClean="0"/>
-              <a:t>1/27/13</a:t>
+              <a:t>5/7/2026</a:t>
             </a:fld>
             <a:endParaRPr lang="en-US"/>
           </a:p>
@@ -921,10 +929,9 @@
           </a:lstStyle>
           <a:p>
             <a:r>
-              <a:rPr lang="en-US" smtClean="0"/>
+              <a:rPr lang="en-US"/>
               <a:t>Click to edit Master title style</a:t>
             </a:r>
-            <a:endParaRPr lang="en-US"/>
           </a:p>
         </p:txBody>
       </p:sp>
@@ -1041,7 +1048,7 @@
           <a:p>
             <a:pPr lvl="0"/>
             <a:r>
-              <a:rPr lang="en-US" smtClean="0"/>
+              <a:rPr lang="en-US"/>
               <a:t>Click to edit Master text styles</a:t>
             </a:r>
           </a:p>
@@ -1064,7 +1071,7 @@
           <a:p>
             <a:fld id="{5BCAD085-E8A6-8845-BD4E-CB4CCA059FC4}" type="datetimeFigureOut">
               <a:rPr lang="en-US" smtClean="0"/>
-              <a:t>1/27/13</a:t>
+              <a:t>5/7/2026</a:t>
             </a:fld>
             <a:endParaRPr lang="en-US"/>
           </a:p>
@@ -1158,10 +1165,9 @@
           <a:lstStyle/>
           <a:p>
             <a:r>
-              <a:rPr lang="en-US" smtClean="0"/>
+              <a:rPr lang="en-US"/>
               <a:t>Click to edit Master title style</a:t>
             </a:r>
-            <a:endParaRPr lang="en-US"/>
           </a:p>
         </p:txBody>
       </p:sp>
@@ -1215,38 +1221,37 @@
           <a:p>
             <a:pPr lvl="0"/>
             <a:r>
-              <a:rPr lang="en-US" smtClean="0"/>
+              <a:rPr lang="en-US"/>
               <a:t>Click to edit Master text styles</a:t>
             </a:r>
           </a:p>
           <a:p>
             <a:pPr lvl="1"/>
             <a:r>
-              <a:rPr lang="en-US" smtClean="0"/>
+              <a:rPr lang="en-US"/>
               <a:t>Second level</a:t>
             </a:r>
           </a:p>
           <a:p>
             <a:pPr lvl="2"/>
             <a:r>
-              <a:rPr lang="en-US" smtClean="0"/>
+              <a:rPr lang="en-US"/>
               <a:t>Third level</a:t>
             </a:r>
           </a:p>
           <a:p>
             <a:pPr lvl="3"/>
             <a:r>
-              <a:rPr lang="en-US" smtClean="0"/>
+              <a:rPr lang="en-US"/>
               <a:t>Fourth level</a:t>
             </a:r>
           </a:p>
           <a:p>
             <a:pPr lvl="4"/>
             <a:r>
-              <a:rPr lang="en-US" smtClean="0"/>
+              <a:rPr lang="en-US"/>
               <a:t>Fifth level</a:t>
             </a:r>
-            <a:endParaRPr lang="en-US"/>
           </a:p>
         </p:txBody>
       </p:sp>
@@ -1300,38 +1305,37 @@
           <a:p>
             <a:pPr lvl="0"/>
             <a:r>
-              <a:rPr lang="en-US" smtClean="0"/>
+              <a:rPr lang="en-US"/>
               <a:t>Click to edit Master text styles</a:t>
             </a:r>
           </a:p>
           <a:p>
             <a:pPr lvl="1"/>
             <a:r>
-              <a:rPr lang="en-US" smtClean="0"/>
+              <a:rPr lang="en-US"/>
               <a:t>Second level</a:t>
             </a:r>
           </a:p>
           <a:p>
             <a:pPr lvl="2"/>
             <a:r>
-              <a:rPr lang="en-US" smtClean="0"/>
+              <a:rPr lang="en-US"/>
               <a:t>Third level</a:t>
             </a:r>
           </a:p>
           <a:p>
             <a:pPr lvl="3"/>
             <a:r>
-              <a:rPr lang="en-US" smtClean="0"/>
+              <a:rPr lang="en-US"/>
               <a:t>Fourth level</a:t>
             </a:r>
           </a:p>
           <a:p>
             <a:pPr lvl="4"/>
             <a:r>
-              <a:rPr lang="en-US" smtClean="0"/>
+              <a:rPr lang="en-US"/>
               <a:t>Fifth level</a:t>
             </a:r>
-            <a:endParaRPr lang="en-US"/>
           </a:p>
         </p:txBody>
       </p:sp>
@@ -1352,7 +1356,7 @@
           <a:p>
             <a:fld id="{5BCAD085-E8A6-8845-BD4E-CB4CCA059FC4}" type="datetimeFigureOut">
               <a:rPr lang="en-US" smtClean="0"/>
-              <a:t>1/27/13</a:t>
+              <a:t>5/7/2026</a:t>
             </a:fld>
             <a:endParaRPr lang="en-US"/>
           </a:p>
@@ -1450,10 +1454,9 @@
           </a:lstStyle>
           <a:p>
             <a:r>
-              <a:rPr lang="en-US" smtClean="0"/>
+              <a:rPr lang="en-US"/>
               <a:t>Click to edit Master title style</a:t>
             </a:r>
-            <a:endParaRPr lang="en-US"/>
           </a:p>
         </p:txBody>
       </p:sp>
@@ -1516,7 +1519,7 @@
           <a:p>
             <a:pPr lvl="0"/>
             <a:r>
-              <a:rPr lang="en-US" smtClean="0"/>
+              <a:rPr lang="en-US"/>
               <a:t>Click to edit Master text styles</a:t>
             </a:r>
           </a:p>
@@ -1572,38 +1575,37 @@
           <a:p>
             <a:pPr lvl="0"/>
             <a:r>
-              <a:rPr lang="en-US" smtClean="0"/>
+              <a:rPr lang="en-US"/>
               <a:t>Click to edit Master text styles</a:t>
             </a:r>
           </a:p>
           <a:p>
             <a:pPr lvl="1"/>
             <a:r>
-              <a:rPr lang="en-US" smtClean="0"/>
+              <a:rPr lang="en-US"/>
               <a:t>Second level</a:t>
             </a:r>
           </a:p>
           <a:p>
             <a:pPr lvl="2"/>
             <a:r>
-              <a:rPr lang="en-US" smtClean="0"/>
+              <a:rPr lang="en-US"/>
               <a:t>Third level</a:t>
             </a:r>
           </a:p>
           <a:p>
             <a:pPr lvl="3"/>
             <a:r>
-              <a:rPr lang="en-US" smtClean="0"/>
+              <a:rPr lang="en-US"/>
               <a:t>Fourth level</a:t>
             </a:r>
           </a:p>
           <a:p>
             <a:pPr lvl="4"/>
             <a:r>
-              <a:rPr lang="en-US" smtClean="0"/>
+              <a:rPr lang="en-US"/>
               <a:t>Fifth level</a:t>
             </a:r>
-            <a:endParaRPr lang="en-US"/>
           </a:p>
         </p:txBody>
       </p:sp>
@@ -1666,7 +1668,7 @@
           <a:p>
             <a:pPr lvl="0"/>
             <a:r>
-              <a:rPr lang="en-US" smtClean="0"/>
+              <a:rPr lang="en-US"/>
               <a:t>Click to edit Master text styles</a:t>
             </a:r>
           </a:p>
@@ -1722,38 +1724,37 @@
           <a:p>
             <a:pPr lvl="0"/>
             <a:r>
-              <a:rPr lang="en-US" smtClean="0"/>
+              <a:rPr lang="en-US"/>
               <a:t>Click to edit Master text styles</a:t>
             </a:r>
           </a:p>
           <a:p>
             <a:pPr lvl="1"/>
             <a:r>
-              <a:rPr lang="en-US" smtClean="0"/>
+              <a:rPr lang="en-US"/>
               <a:t>Second level</a:t>
             </a:r>
           </a:p>
           <a:p>
             <a:pPr lvl="2"/>
             <a:r>
-              <a:rPr lang="en-US" smtClean="0"/>
+              <a:rPr lang="en-US"/>
               <a:t>Third level</a:t>
             </a:r>
           </a:p>
           <a:p>
             <a:pPr lvl="3"/>
             <a:r>
-              <a:rPr lang="en-US" smtClean="0"/>
+              <a:rPr lang="en-US"/>
               <a:t>Fourth level</a:t>
             </a:r>
           </a:p>
           <a:p>
             <a:pPr lvl="4"/>
             <a:r>
-              <a:rPr lang="en-US" smtClean="0"/>
+              <a:rPr lang="en-US"/>
               <a:t>Fifth level</a:t>
             </a:r>
-            <a:endParaRPr lang="en-US"/>
           </a:p>
         </p:txBody>
       </p:sp>
@@ -1774,7 +1775,7 @@
           <a:p>
             <a:fld id="{5BCAD085-E8A6-8845-BD4E-CB4CCA059FC4}" type="datetimeFigureOut">
               <a:rPr lang="en-US" smtClean="0"/>
-              <a:t>1/27/13</a:t>
+              <a:t>5/7/2026</a:t>
             </a:fld>
             <a:endParaRPr lang="en-US"/>
           </a:p>
@@ -1868,10 +1869,9 @@
           <a:lstStyle/>
           <a:p>
             <a:r>
-              <a:rPr lang="en-US" smtClean="0"/>
+              <a:rPr lang="en-US"/>
               <a:t>Click to edit Master title style</a:t>
             </a:r>
-            <a:endParaRPr lang="en-US"/>
           </a:p>
         </p:txBody>
       </p:sp>
@@ -1892,7 +1892,7 @@
           <a:p>
             <a:fld id="{5BCAD085-E8A6-8845-BD4E-CB4CCA059FC4}" type="datetimeFigureOut">
               <a:rPr lang="en-US" smtClean="0"/>
-              <a:t>1/27/13</a:t>
+              <a:t>5/7/2026</a:t>
             </a:fld>
             <a:endParaRPr lang="en-US"/>
           </a:p>
@@ -1987,7 +1987,7 @@
           <a:p>
             <a:fld id="{5BCAD085-E8A6-8845-BD4E-CB4CCA059FC4}" type="datetimeFigureOut">
               <a:rPr lang="en-US" smtClean="0"/>
-              <a:t>1/27/13</a:t>
+              <a:t>5/7/2026</a:t>
             </a:fld>
             <a:endParaRPr lang="en-US"/>
           </a:p>
@@ -2090,10 +2090,9 @@
           </a:lstStyle>
           <a:p>
             <a:r>
-              <a:rPr lang="en-US" smtClean="0"/>
+              <a:rPr lang="en-US"/>
               <a:t>Click to edit Master title style</a:t>
             </a:r>
-            <a:endParaRPr lang="en-US"/>
           </a:p>
         </p:txBody>
       </p:sp>
@@ -2147,38 +2146,37 @@
           <a:p>
             <a:pPr lvl="0"/>
             <a:r>
-              <a:rPr lang="en-US" smtClean="0"/>
+              <a:rPr lang="en-US"/>
               <a:t>Click to edit Master text styles</a:t>
             </a:r>
           </a:p>
           <a:p>
             <a:pPr lvl="1"/>
             <a:r>
-              <a:rPr lang="en-US" smtClean="0"/>
+              <a:rPr lang="en-US"/>
               <a:t>Second level</a:t>
             </a:r>
           </a:p>
           <a:p>
             <a:pPr lvl="2"/>
             <a:r>
-              <a:rPr lang="en-US" smtClean="0"/>
+              <a:rPr lang="en-US"/>
               <a:t>Third level</a:t>
             </a:r>
           </a:p>
           <a:p>
             <a:pPr lvl="3"/>
             <a:r>
-              <a:rPr lang="en-US" smtClean="0"/>
+              <a:rPr lang="en-US"/>
               <a:t>Fourth level</a:t>
             </a:r>
           </a:p>
           <a:p>
             <a:pPr lvl="4"/>
             <a:r>
-              <a:rPr lang="en-US" smtClean="0"/>
+              <a:rPr lang="en-US"/>
               <a:t>Fifth level</a:t>
             </a:r>
-            <a:endParaRPr lang="en-US"/>
           </a:p>
         </p:txBody>
       </p:sp>
@@ -2241,7 +2239,7 @@
           <a:p>
             <a:pPr lvl="0"/>
             <a:r>
-              <a:rPr lang="en-US" smtClean="0"/>
+              <a:rPr lang="en-US"/>
               <a:t>Click to edit Master text styles</a:t>
             </a:r>
           </a:p>
@@ -2264,7 +2262,7 @@
           <a:p>
             <a:fld id="{5BCAD085-E8A6-8845-BD4E-CB4CCA059FC4}" type="datetimeFigureOut">
               <a:rPr lang="en-US" smtClean="0"/>
-              <a:t>1/27/13</a:t>
+              <a:t>5/7/2026</a:t>
             </a:fld>
             <a:endParaRPr lang="en-US"/>
           </a:p>
@@ -2367,10 +2365,9 @@
           </a:lstStyle>
           <a:p>
             <a:r>
-              <a:rPr lang="en-US" smtClean="0"/>
+              <a:rPr lang="en-US"/>
               <a:t>Click to edit Master title style</a:t>
             </a:r>
-            <a:endParaRPr lang="en-US"/>
           </a:p>
         </p:txBody>
       </p:sp>
@@ -2494,7 +2491,7 @@
           <a:p>
             <a:pPr lvl="0"/>
             <a:r>
-              <a:rPr lang="en-US" smtClean="0"/>
+              <a:rPr lang="en-US"/>
               <a:t>Click to edit Master text styles</a:t>
             </a:r>
           </a:p>
@@ -2517,7 +2514,7 @@
           <a:p>
             <a:fld id="{5BCAD085-E8A6-8845-BD4E-CB4CCA059FC4}" type="datetimeFigureOut">
               <a:rPr lang="en-US" smtClean="0"/>
-              <a:t>1/27/13</a:t>
+              <a:t>5/7/2026</a:t>
             </a:fld>
             <a:endParaRPr lang="en-US"/>
           </a:p>
@@ -2626,10 +2623,9 @@
           <a:lstStyle/>
           <a:p>
             <a:r>
-              <a:rPr lang="en-US" smtClean="0"/>
+              <a:rPr lang="en-US"/>
               <a:t>Click to edit Master title style</a:t>
             </a:r>
-            <a:endParaRPr lang="en-US"/>
           </a:p>
         </p:txBody>
       </p:sp>
@@ -2660,38 +2656,37 @@
           <a:p>
             <a:pPr lvl="0"/>
             <a:r>
-              <a:rPr lang="en-US" smtClean="0"/>
+              <a:rPr lang="en-US"/>
               <a:t>Click to edit Master text styles</a:t>
             </a:r>
           </a:p>
           <a:p>
             <a:pPr lvl="1"/>
             <a:r>
-              <a:rPr lang="en-US" smtClean="0"/>
+              <a:rPr lang="en-US"/>
               <a:t>Second level</a:t>
             </a:r>
           </a:p>
           <a:p>
             <a:pPr lvl="2"/>
             <a:r>
-              <a:rPr lang="en-US" smtClean="0"/>
+              <a:rPr lang="en-US"/>
               <a:t>Third level</a:t>
             </a:r>
           </a:p>
           <a:p>
             <a:pPr lvl="3"/>
             <a:r>
-              <a:rPr lang="en-US" smtClean="0"/>
+              <a:rPr lang="en-US"/>
               <a:t>Fourth level</a:t>
             </a:r>
           </a:p>
           <a:p>
             <a:pPr lvl="4"/>
             <a:r>
-              <a:rPr lang="en-US" smtClean="0"/>
+              <a:rPr lang="en-US"/>
               <a:t>Fifth level</a:t>
             </a:r>
-            <a:endParaRPr lang="en-US"/>
           </a:p>
         </p:txBody>
       </p:sp>
@@ -2730,7 +2725,7 @@
           <a:p>
             <a:fld id="{5BCAD085-E8A6-8845-BD4E-CB4CCA059FC4}" type="datetimeFigureOut">
               <a:rPr lang="en-US" smtClean="0"/>
-              <a:t>1/27/13</a:t>
+              <a:t>5/7/2026</a:t>
             </a:fld>
             <a:endParaRPr lang="en-US"/>
           </a:p>
@@ -3089,7 +3084,7 @@
 </file>
 
 <file path=ppt/slides/slide1.xml><?xml version="1.0" encoding="utf-8"?>
-<p:sld xmlns:a="http://schemas.openxmlformats.org/drawingml/2006/main" xmlns:p="http://schemas.openxmlformats.org/presentationml/2006/main" xmlns:r="http://schemas.openxmlformats.org/officeDocument/2006/relationships">
+<p:sld xmlns:a="http://schemas.openxmlformats.org/drawingml/2006/main" xmlns:r="http://schemas.openxmlformats.org/officeDocument/2006/relationships" xmlns:p="http://schemas.openxmlformats.org/presentationml/2006/main">
   <p:cSld>
     <p:spTree>
       <p:nvGrpSpPr>
@@ -3097,7 +3092,14 @@
         <p:cNvGrpSpPr/>
         <p:nvPr/>
       </p:nvGrpSpPr>
-      <p:grpSpPr/>
+      <p:grpSpPr>
+        <a:xfrm>
+          <a:off x="0" y="0"/>
+          <a:ext cx="0" cy="0"/>
+          <a:chOff x="0" y="0"/>
+          <a:chExt cx="0" cy="0"/>
+        </a:xfrm>
+      </p:grpSpPr>
       <p:sp>
         <p:nvSpPr>
           <p:cNvPr id="2" name="Rectangle 1"/>
@@ -3138,6 +3140,7 @@
           <a:lstStyle/>
           <a:p>
             <a:pPr algn="ctr"/>
+            <a:endParaRPr/>
           </a:p>
         </p:txBody>
       </p:sp>
@@ -3181,6 +3184,7 @@
           <a:lstStyle/>
           <a:p>
             <a:pPr algn="ctr"/>
+            <a:endParaRPr/>
           </a:p>
         </p:txBody>
       </p:sp>
@@ -3224,6 +3228,7 @@
           <a:lstStyle/>
           <a:p>
             <a:pPr algn="ctr"/>
+            <a:endParaRPr/>
           </a:p>
         </p:txBody>
       </p:sp>
@@ -3267,6 +3272,7 @@
           <a:lstStyle/>
           <a:p>
             <a:pPr algn="ctr"/>
+            <a:endParaRPr/>
           </a:p>
         </p:txBody>
       </p:sp>
@@ -3310,6 +3316,7 @@
           <a:lstStyle/>
           <a:p>
             <a:pPr algn="ctr"/>
+            <a:endParaRPr/>
           </a:p>
         </p:txBody>
       </p:sp>
@@ -3353,6 +3360,7 @@
           <a:lstStyle/>
           <a:p>
             <a:pPr algn="ctr"/>
+            <a:endParaRPr/>
           </a:p>
         </p:txBody>
       </p:sp>
@@ -3379,14 +3387,14 @@
           <a:lstStyle/>
           <a:p>
             <a:pPr>
-              <a:defRPr sz="5600" b="1">
+              <a:defRPr sz="5400" b="1">
                 <a:solidFill>
                   <a:srgbClr val="FFFFFF"/>
                 </a:solidFill>
               </a:defRPr>
             </a:pPr>
             <a:r>
-              <a:t>Express API Demo</a:t>
+              <a:t>Paging, Filtering, and API Docs</a:t>
             </a:r>
           </a:p>
         </p:txBody>
@@ -3421,7 +3429,7 @@
               </a:defRPr>
             </a:pPr>
             <a:r>
-              <a:t>Paging, Filtering, and OpenAPI patterns with React + TanStack Query</a:t>
+              <a:t>Patterns walkthrough with React, TanStack Query, and Express</a:t>
             </a:r>
           </a:p>
         </p:txBody>
@@ -3435,7 +3443,7 @@
 </file>
 
 <file path=ppt/slides/slide10.xml><?xml version="1.0" encoding="utf-8"?>
-<p:sld xmlns:a="http://schemas.openxmlformats.org/drawingml/2006/main" xmlns:p="http://schemas.openxmlformats.org/presentationml/2006/main" xmlns:r="http://schemas.openxmlformats.org/officeDocument/2006/relationships">
+<p:sld xmlns:a="http://schemas.openxmlformats.org/drawingml/2006/main" xmlns:r="http://schemas.openxmlformats.org/officeDocument/2006/relationships" xmlns:p="http://schemas.openxmlformats.org/presentationml/2006/main">
   <p:cSld>
     <p:spTree>
       <p:nvGrpSpPr>
@@ -3443,7 +3451,14 @@
         <p:cNvGrpSpPr/>
         <p:nvPr/>
       </p:nvGrpSpPr>
-      <p:grpSpPr/>
+      <p:grpSpPr>
+        <a:xfrm>
+          <a:off x="0" y="0"/>
+          <a:ext cx="0" cy="0"/>
+          <a:chOff x="0" y="0"/>
+          <a:chExt cx="0" cy="0"/>
+        </a:xfrm>
+      </p:grpSpPr>
       <p:sp>
         <p:nvSpPr>
           <p:cNvPr id="2" name="TextBox 1"/>
@@ -3519,6 +3534,7 @@
           <a:lstStyle/>
           <a:p>
             <a:pPr algn="ctr"/>
+            <a:endParaRPr/>
           </a:p>
         </p:txBody>
       </p:sp>
@@ -3562,6 +3578,7 @@
           <a:lstStyle/>
           <a:p>
             <a:pPr algn="ctr"/>
+            <a:endParaRPr/>
           </a:p>
         </p:txBody>
       </p:sp>
@@ -3659,7 +3676,7 @@
           </a:ln>
         </p:spPr>
         <p:txBody>
-          <a:bodyPr wrap="square" lIns="182880" rIns="137160" tIns="137160" bIns="91440">
+          <a:bodyPr wrap="square" lIns="182880" tIns="137160" rIns="137160" bIns="91440">
             <a:spAutoFit/>
           </a:bodyPr>
           <a:lstStyle/>
@@ -3906,6 +3923,7 @@
                 <a:latin typeface="Consolas"/>
               </a:defRPr>
             </a:pPr>
+            <a:endParaRPr/>
           </a:p>
           <a:p>
             <a:pPr>
@@ -3994,7 +4012,7 @@
           </a:ln>
         </p:spPr>
         <p:txBody>
-          <a:bodyPr wrap="square" lIns="182880" rIns="137160" tIns="137160" bIns="91440">
+          <a:bodyPr wrap="square" lIns="182880" tIns="137160" rIns="137160" bIns="91440">
             <a:spAutoFit/>
           </a:bodyPr>
           <a:lstStyle/>
@@ -4020,6 +4038,7 @@
                 <a:latin typeface="Consolas"/>
               </a:defRPr>
             </a:pPr>
+            <a:endParaRPr/>
           </a:p>
           <a:p>
             <a:pPr>
@@ -4173,6 +4192,7 @@
                 <a:latin typeface="Consolas"/>
               </a:defRPr>
             </a:pPr>
+            <a:endParaRPr/>
           </a:p>
           <a:p>
             <a:pPr>
@@ -4255,6 +4275,7 @@
           <a:lstStyle/>
           <a:p>
             <a:pPr algn="ctr"/>
+            <a:endParaRPr/>
           </a:p>
         </p:txBody>
       </p:sp>
@@ -4298,6 +4319,7 @@
           <a:lstStyle/>
           <a:p>
             <a:pPr algn="ctr"/>
+            <a:endParaRPr/>
           </a:p>
         </p:txBody>
       </p:sp>
@@ -4331,7 +4353,7 @@
               </a:defRPr>
             </a:pPr>
             <a:r>
-              <a:t>Express API Demo  ·  10 / 11</a:t>
+              <a:t>Paging, Filtering, and API Docs  ·  10 / 11</a:t>
             </a:r>
           </a:p>
         </p:txBody>
@@ -4376,6 +4398,7 @@
           <a:lstStyle/>
           <a:p>
             <a:pPr algn="ctr"/>
+            <a:endParaRPr/>
           </a:p>
         </p:txBody>
       </p:sp>
@@ -4388,7 +4411,7 @@
 </file>
 
 <file path=ppt/slides/slide11.xml><?xml version="1.0" encoding="utf-8"?>
-<p:sld xmlns:a="http://schemas.openxmlformats.org/drawingml/2006/main" xmlns:p="http://schemas.openxmlformats.org/presentationml/2006/main" xmlns:r="http://schemas.openxmlformats.org/officeDocument/2006/relationships">
+<p:sld xmlns:a="http://schemas.openxmlformats.org/drawingml/2006/main" xmlns:r="http://schemas.openxmlformats.org/officeDocument/2006/relationships" xmlns:p="http://schemas.openxmlformats.org/presentationml/2006/main">
   <p:cSld>
     <p:spTree>
       <p:nvGrpSpPr>
@@ -4396,7 +4419,14 @@
         <p:cNvGrpSpPr/>
         <p:nvPr/>
       </p:nvGrpSpPr>
-      <p:grpSpPr/>
+      <p:grpSpPr>
+        <a:xfrm>
+          <a:off x="0" y="0"/>
+          <a:ext cx="0" cy="0"/>
+          <a:chOff x="0" y="0"/>
+          <a:chExt cx="0" cy="0"/>
+        </a:xfrm>
+      </p:grpSpPr>
       <p:sp>
         <p:nvSpPr>
           <p:cNvPr id="2" name="Rectangle 1"/>
@@ -4437,6 +4467,7 @@
           <a:lstStyle/>
           <a:p>
             <a:pPr algn="ctr"/>
+            <a:endParaRPr/>
           </a:p>
         </p:txBody>
       </p:sp>
@@ -4480,6 +4511,7 @@
           <a:lstStyle/>
           <a:p>
             <a:pPr algn="ctr"/>
+            <a:endParaRPr/>
           </a:p>
         </p:txBody>
       </p:sp>
@@ -4523,6 +4555,7 @@
           <a:lstStyle/>
           <a:p>
             <a:pPr algn="ctr"/>
+            <a:endParaRPr/>
           </a:p>
         </p:txBody>
       </p:sp>
@@ -4566,6 +4599,7 @@
           <a:lstStyle/>
           <a:p>
             <a:pPr algn="ctr"/>
+            <a:endParaRPr/>
           </a:p>
         </p:txBody>
       </p:sp>
@@ -4609,6 +4643,7 @@
           <a:lstStyle/>
           <a:p>
             <a:pPr algn="ctr"/>
+            <a:endParaRPr/>
           </a:p>
         </p:txBody>
       </p:sp>
@@ -4652,6 +4687,7 @@
           <a:lstStyle/>
           <a:p>
             <a:pPr algn="ctr"/>
+            <a:endParaRPr/>
           </a:p>
         </p:txBody>
       </p:sp>
@@ -4734,7 +4770,7 @@
 </file>
 
 <file path=ppt/slides/slide2.xml><?xml version="1.0" encoding="utf-8"?>
-<p:sld xmlns:a="http://schemas.openxmlformats.org/drawingml/2006/main" xmlns:p="http://schemas.openxmlformats.org/presentationml/2006/main" xmlns:r="http://schemas.openxmlformats.org/officeDocument/2006/relationships">
+<p:sld xmlns:a="http://schemas.openxmlformats.org/drawingml/2006/main" xmlns:r="http://schemas.openxmlformats.org/officeDocument/2006/relationships" xmlns:p="http://schemas.openxmlformats.org/presentationml/2006/main">
   <p:cSld>
     <p:spTree>
       <p:nvGrpSpPr>
@@ -4742,7 +4778,14 @@
         <p:cNvGrpSpPr/>
         <p:nvPr/>
       </p:nvGrpSpPr>
-      <p:grpSpPr/>
+      <p:grpSpPr>
+        <a:xfrm>
+          <a:off x="0" y="0"/>
+          <a:ext cx="0" cy="0"/>
+          <a:chOff x="0" y="0"/>
+          <a:chExt cx="0" cy="0"/>
+        </a:xfrm>
+      </p:grpSpPr>
       <p:sp>
         <p:nvSpPr>
           <p:cNvPr id="2" name="TextBox 1"/>
@@ -4818,6 +4861,7 @@
           <a:lstStyle/>
           <a:p>
             <a:pPr algn="ctr"/>
+            <a:endParaRPr/>
           </a:p>
         </p:txBody>
       </p:sp>
@@ -4861,6 +4905,7 @@
           <a:lstStyle/>
           <a:p>
             <a:pPr algn="ctr"/>
+            <a:endParaRPr/>
           </a:p>
         </p:txBody>
       </p:sp>
@@ -5032,6 +5077,7 @@
           <a:lstStyle/>
           <a:p>
             <a:pPr algn="ctr"/>
+            <a:endParaRPr/>
           </a:p>
         </p:txBody>
       </p:sp>
@@ -5075,6 +5121,7 @@
           <a:lstStyle/>
           <a:p>
             <a:pPr algn="ctr"/>
+            <a:endParaRPr/>
           </a:p>
         </p:txBody>
       </p:sp>
@@ -5108,7 +5155,7 @@
               </a:defRPr>
             </a:pPr>
             <a:r>
-              <a:t>Express API Demo  ·  2 / 11</a:t>
+              <a:t>Paging, Filtering, and API Docs  ·  2 / 11</a:t>
             </a:r>
           </a:p>
         </p:txBody>
@@ -5153,6 +5200,7 @@
           <a:lstStyle/>
           <a:p>
             <a:pPr algn="ctr"/>
+            <a:endParaRPr/>
           </a:p>
         </p:txBody>
       </p:sp>
@@ -5165,7 +5213,7 @@
 </file>
 
 <file path=ppt/slides/slide3.xml><?xml version="1.0" encoding="utf-8"?>
-<p:sld xmlns:a="http://schemas.openxmlformats.org/drawingml/2006/main" xmlns:p="http://schemas.openxmlformats.org/presentationml/2006/main" xmlns:r="http://schemas.openxmlformats.org/officeDocument/2006/relationships">
+<p:sld xmlns:a="http://schemas.openxmlformats.org/drawingml/2006/main" xmlns:r="http://schemas.openxmlformats.org/officeDocument/2006/relationships" xmlns:p="http://schemas.openxmlformats.org/presentationml/2006/main">
   <p:cSld>
     <p:spTree>
       <p:nvGrpSpPr>
@@ -5173,7 +5221,14 @@
         <p:cNvGrpSpPr/>
         <p:nvPr/>
       </p:nvGrpSpPr>
-      <p:grpSpPr/>
+      <p:grpSpPr>
+        <a:xfrm>
+          <a:off x="0" y="0"/>
+          <a:ext cx="0" cy="0"/>
+          <a:chOff x="0" y="0"/>
+          <a:chExt cx="0" cy="0"/>
+        </a:xfrm>
+      </p:grpSpPr>
       <p:sp>
         <p:nvSpPr>
           <p:cNvPr id="2" name="TextBox 1"/>
@@ -5249,6 +5304,7 @@
           <a:lstStyle/>
           <a:p>
             <a:pPr algn="ctr"/>
+            <a:endParaRPr/>
           </a:p>
         </p:txBody>
       </p:sp>
@@ -5292,6 +5348,7 @@
           <a:lstStyle/>
           <a:p>
             <a:pPr algn="ctr"/>
+            <a:endParaRPr/>
           </a:p>
         </p:txBody>
       </p:sp>
@@ -5418,6 +5475,7 @@
           <a:lstStyle/>
           <a:p>
             <a:pPr algn="ctr"/>
+            <a:endParaRPr/>
           </a:p>
         </p:txBody>
       </p:sp>
@@ -5461,6 +5519,7 @@
           <a:lstStyle/>
           <a:p>
             <a:pPr algn="ctr"/>
+            <a:endParaRPr/>
           </a:p>
         </p:txBody>
       </p:sp>
@@ -5494,7 +5553,7 @@
               </a:defRPr>
             </a:pPr>
             <a:r>
-              <a:t>Express API Demo  ·  3 / 11</a:t>
+              <a:t>Paging, Filtering, and API Docs  ·  3 / 11</a:t>
             </a:r>
           </a:p>
         </p:txBody>
@@ -5539,6 +5598,7 @@
           <a:lstStyle/>
           <a:p>
             <a:pPr algn="ctr"/>
+            <a:endParaRPr/>
           </a:p>
         </p:txBody>
       </p:sp>
@@ -5551,7 +5611,7 @@
 </file>
 
 <file path=ppt/slides/slide4.xml><?xml version="1.0" encoding="utf-8"?>
-<p:sld xmlns:a="http://schemas.openxmlformats.org/drawingml/2006/main" xmlns:p="http://schemas.openxmlformats.org/presentationml/2006/main" xmlns:r="http://schemas.openxmlformats.org/officeDocument/2006/relationships">
+<p:sld xmlns:a="http://schemas.openxmlformats.org/drawingml/2006/main" xmlns:r="http://schemas.openxmlformats.org/officeDocument/2006/relationships" xmlns:p="http://schemas.openxmlformats.org/presentationml/2006/main">
   <p:cSld>
     <p:spTree>
       <p:nvGrpSpPr>
@@ -5559,7 +5619,14 @@
         <p:cNvGrpSpPr/>
         <p:nvPr/>
       </p:nvGrpSpPr>
-      <p:grpSpPr/>
+      <p:grpSpPr>
+        <a:xfrm>
+          <a:off x="0" y="0"/>
+          <a:ext cx="0" cy="0"/>
+          <a:chOff x="0" y="0"/>
+          <a:chExt cx="0" cy="0"/>
+        </a:xfrm>
+      </p:grpSpPr>
       <p:sp>
         <p:nvSpPr>
           <p:cNvPr id="2" name="TextBox 1"/>
@@ -5635,6 +5702,7 @@
           <a:lstStyle/>
           <a:p>
             <a:pPr algn="ctr"/>
+            <a:endParaRPr/>
           </a:p>
         </p:txBody>
       </p:sp>
@@ -5678,6 +5746,7 @@
           <a:lstStyle/>
           <a:p>
             <a:pPr algn="ctr"/>
+            <a:endParaRPr/>
           </a:p>
         </p:txBody>
       </p:sp>
@@ -5721,6 +5790,7 @@
           <a:lstStyle/>
           <a:p>
             <a:pPr algn="ctr"/>
+            <a:endParaRPr/>
           </a:p>
         </p:txBody>
       </p:sp>
@@ -5748,7 +5818,7 @@
           </a:ln>
         </p:spPr>
         <p:txBody>
-          <a:bodyPr wrap="square" lIns="274320" rIns="182880" tIns="182880" bIns="137160">
+          <a:bodyPr wrap="square" lIns="274320" tIns="182880" rIns="182880" bIns="137160">
             <a:spAutoFit/>
           </a:bodyPr>
           <a:lstStyle/>
@@ -6002,6 +6072,7 @@
           <a:lstStyle/>
           <a:p>
             <a:pPr algn="ctr"/>
+            <a:endParaRPr/>
           </a:p>
         </p:txBody>
       </p:sp>
@@ -6045,6 +6116,7 @@
           <a:lstStyle/>
           <a:p>
             <a:pPr algn="ctr"/>
+            <a:endParaRPr/>
           </a:p>
         </p:txBody>
       </p:sp>
@@ -6078,7 +6150,7 @@
               </a:defRPr>
             </a:pPr>
             <a:r>
-              <a:t>Express API Demo  ·  4 / 11</a:t>
+              <a:t>Paging, Filtering, and API Docs  ·  4 / 11</a:t>
             </a:r>
           </a:p>
         </p:txBody>
@@ -6123,6 +6195,7 @@
           <a:lstStyle/>
           <a:p>
             <a:pPr algn="ctr"/>
+            <a:endParaRPr/>
           </a:p>
         </p:txBody>
       </p:sp>
@@ -6135,7 +6208,7 @@
 </file>
 
 <file path=ppt/slides/slide5.xml><?xml version="1.0" encoding="utf-8"?>
-<p:sld xmlns:a="http://schemas.openxmlformats.org/drawingml/2006/main" xmlns:p="http://schemas.openxmlformats.org/presentationml/2006/main" xmlns:r="http://schemas.openxmlformats.org/officeDocument/2006/relationships">
+<p:sld xmlns:a="http://schemas.openxmlformats.org/drawingml/2006/main" xmlns:r="http://schemas.openxmlformats.org/officeDocument/2006/relationships" xmlns:p="http://schemas.openxmlformats.org/presentationml/2006/main">
   <p:cSld>
     <p:spTree>
       <p:nvGrpSpPr>
@@ -6143,7 +6216,14 @@
         <p:cNvGrpSpPr/>
         <p:nvPr/>
       </p:nvGrpSpPr>
-      <p:grpSpPr/>
+      <p:grpSpPr>
+        <a:xfrm>
+          <a:off x="0" y="0"/>
+          <a:ext cx="0" cy="0"/>
+          <a:chOff x="0" y="0"/>
+          <a:chExt cx="0" cy="0"/>
+        </a:xfrm>
+      </p:grpSpPr>
       <p:sp>
         <p:nvSpPr>
           <p:cNvPr id="2" name="TextBox 1"/>
@@ -6219,6 +6299,7 @@
           <a:lstStyle/>
           <a:p>
             <a:pPr algn="ctr"/>
+            <a:endParaRPr/>
           </a:p>
         </p:txBody>
       </p:sp>
@@ -6262,6 +6343,7 @@
           <a:lstStyle/>
           <a:p>
             <a:pPr algn="ctr"/>
+            <a:endParaRPr/>
           </a:p>
         </p:txBody>
       </p:sp>
@@ -6274,7 +6356,7 @@
         <p:spPr>
           <a:xfrm>
             <a:off x="548640" y="1463040"/>
-            <a:ext cx="10972800" cy="4937760"/>
+            <a:ext cx="10972800" cy="3503523"/>
           </a:xfrm>
           <a:prstGeom prst="rect">
             <a:avLst/>
@@ -6291,14 +6373,23 @@
               <a:spcAft>
                 <a:spcPts val="800"/>
               </a:spcAft>
-              <a:defRPr sz="2000">
-                <a:solidFill>
-                  <a:srgbClr val="1B2631"/>
-                </a:solidFill>
-              </a:defRPr>
-            </a:pPr>
-            <a:r>
-              <a:t>Client paging — /todos-client</a:t>
+              <a:defRPr sz="1700">
+                <a:solidFill>
+                  <a:srgbClr val="1B2631"/>
+                </a:solidFill>
+              </a:defRPr>
+            </a:pPr>
+            <a:r>
+              <a:rPr dirty="0"/>
+              <a:t>Client paging — /</a:t>
+            </a:r>
+            <a:r>
+              <a:rPr dirty="0" err="1"/>
+              <a:t>todos</a:t>
+            </a:r>
+            <a:r>
+              <a:rPr dirty="0"/>
+              <a:t>-client</a:t>
             </a:r>
           </a:p>
           <a:p>
@@ -6306,14 +6397,15 @@
               <a:spcAft>
                 <a:spcPts val="800"/>
               </a:spcAft>
-              <a:defRPr sz="1600">
+              <a:defRPr sz="1300">
                 <a:solidFill>
                   <a:srgbClr val="556E80"/>
                 </a:solidFill>
               </a:defRPr>
             </a:pPr>
             <a:r>
-              <a:t>Fetches the full list once</a:t>
+              <a:rPr dirty="0"/>
+              <a:t>Fetches the full list once; browser handles paging, sorting, column-filtering</a:t>
             </a:r>
           </a:p>
           <a:p>
@@ -6321,14 +6413,15 @@
               <a:spcAft>
                 <a:spcPts val="800"/>
               </a:spcAft>
-              <a:defRPr sz="1600">
+              <a:defRPr sz="1300">
                 <a:solidFill>
                   <a:srgbClr val="556E80"/>
                 </a:solidFill>
               </a:defRPr>
             </a:pPr>
             <a:r>
-              <a:t>PrimeReact handles paging, sorting, and column-filtering in the browser</a:t>
+              <a:rPr dirty="0"/>
+              <a:t>Global search hits the server with ?q=... (full-dataset search)</a:t>
             </a:r>
           </a:p>
           <a:p>
@@ -6336,41 +6429,15 @@
               <a:spcAft>
                 <a:spcPts val="800"/>
               </a:spcAft>
-              <a:defRPr sz="1600">
+              <a:defRPr sz="1300">
                 <a:solidFill>
                   <a:srgbClr val="556E80"/>
                 </a:solidFill>
               </a:defRPr>
             </a:pPr>
             <a:r>
-              <a:t>Global search hits the server with ?q=... (full-dataset search)</a:t>
-            </a:r>
-          </a:p>
-          <a:p>
-            <a:pPr>
-              <a:spcAft>
-                <a:spcPts val="800"/>
-              </a:spcAft>
-              <a:defRPr sz="2000">
-                <a:solidFill>
-                  <a:srgbClr val="1B2631"/>
-                </a:solidFill>
-              </a:defRPr>
-            </a:pPr>
-          </a:p>
-          <a:p>
-            <a:pPr>
-              <a:spcAft>
-                <a:spcPts val="800"/>
-              </a:spcAft>
-              <a:defRPr sz="2000">
-                <a:solidFill>
-                  <a:srgbClr val="1B2631"/>
-                </a:solidFill>
-              </a:defRPr>
-            </a:pPr>
-            <a:r>
-              <a:t>Server paging — /todos-server</a:t>
+              <a:rPr dirty="0"/>
+              <a:t>Pros: instant interactions after load; simple to implement</a:t>
             </a:r>
           </a:p>
           <a:p>
@@ -6378,14 +6445,74 @@
               <a:spcAft>
                 <a:spcPts val="800"/>
               </a:spcAft>
-              <a:defRPr sz="1600">
+              <a:defRPr sz="1300">
                 <a:solidFill>
                   <a:srgbClr val="556E80"/>
                 </a:solidFill>
               </a:defRPr>
             </a:pPr>
             <a:r>
-              <a:t>DataTable runs in lazy mode</a:t>
+              <a:rPr dirty="0"/>
+              <a:t>Cons: initial fetch grows with the dataset; not viable for </a:t>
+            </a:r>
+            <a:r>
+              <a:rPr lang="en-US" dirty="0"/>
+              <a:t>large</a:t>
+            </a:r>
+            <a:r>
+              <a:rPr dirty="0"/>
+              <a:t> </a:t>
+            </a:r>
+            <a:r>
+              <a:t>prod</a:t>
+            </a:r>
+            <a:r>
+              <a:rPr lang="en-US"/>
+              <a:t>uction</a:t>
+            </a:r>
+            <a:r>
+              <a:t> </a:t>
+            </a:r>
+            <a:r>
+              <a:rPr dirty="0"/>
+              <a:t>volume</a:t>
+            </a:r>
+          </a:p>
+          <a:p>
+            <a:pPr>
+              <a:spcAft>
+                <a:spcPts val="800"/>
+              </a:spcAft>
+              <a:defRPr sz="1700">
+                <a:solidFill>
+                  <a:srgbClr val="1B2631"/>
+                </a:solidFill>
+              </a:defRPr>
+            </a:pPr>
+            <a:endParaRPr dirty="0"/>
+          </a:p>
+          <a:p>
+            <a:pPr>
+              <a:spcAft>
+                <a:spcPts val="800"/>
+              </a:spcAft>
+              <a:defRPr sz="1700">
+                <a:solidFill>
+                  <a:srgbClr val="1B2631"/>
+                </a:solidFill>
+              </a:defRPr>
+            </a:pPr>
+            <a:r>
+              <a:rPr dirty="0"/>
+              <a:t>Server paging — /</a:t>
+            </a:r>
+            <a:r>
+              <a:rPr dirty="0" err="1"/>
+              <a:t>todos</a:t>
+            </a:r>
+            <a:r>
+              <a:rPr dirty="0"/>
+              <a:t>-server</a:t>
             </a:r>
           </a:p>
           <a:p>
@@ -6393,14 +6520,19 @@
               <a:spcAft>
                 <a:spcPts val="800"/>
               </a:spcAft>
-              <a:defRPr sz="1600">
+              <a:defRPr sz="1300">
                 <a:solidFill>
                   <a:srgbClr val="556E80"/>
                 </a:solidFill>
               </a:defRPr>
             </a:pPr>
             <a:r>
-              <a:t>Each new combination of page, sort, filter, search → one server request</a:t>
+              <a:rPr dirty="0" err="1"/>
+              <a:t>DataTable</a:t>
+            </a:r>
+            <a:r>
+              <a:rPr dirty="0"/>
+              <a:t> in lazy mode; each new page/sort/filter/search → one request</a:t>
             </a:r>
           </a:p>
           <a:p>
@@ -6408,14 +6540,51 @@
               <a:spcAft>
                 <a:spcPts val="800"/>
               </a:spcAft>
-              <a:defRPr sz="1600">
+              <a:defRPr sz="1300">
                 <a:solidFill>
                   <a:srgbClr val="556E80"/>
                 </a:solidFill>
               </a:defRPr>
             </a:pPr>
             <a:r>
-              <a:t>Repeats served instantly from TanStack Query's cache</a:t>
+              <a:rPr dirty="0" err="1"/>
+              <a:t>TanStack</a:t>
+            </a:r>
+            <a:r>
+              <a:rPr dirty="0"/>
+              <a:t> Query caches repeats; revisits are served from cache</a:t>
+            </a:r>
+          </a:p>
+          <a:p>
+            <a:pPr lvl="1">
+              <a:spcAft>
+                <a:spcPts val="800"/>
+              </a:spcAft>
+              <a:defRPr sz="1300">
+                <a:solidFill>
+                  <a:srgbClr val="556E80"/>
+                </a:solidFill>
+              </a:defRPr>
+            </a:pPr>
+            <a:r>
+              <a:rPr dirty="0"/>
+              <a:t>Pros: scales to millions of rows; always fresh; low client memory</a:t>
+            </a:r>
+          </a:p>
+          <a:p>
+            <a:pPr lvl="1">
+              <a:spcAft>
+                <a:spcPts val="800"/>
+              </a:spcAft>
+              <a:defRPr sz="1300">
+                <a:solidFill>
+                  <a:srgbClr val="556E80"/>
+                </a:solidFill>
+              </a:defRPr>
+            </a:pPr>
+            <a:r>
+              <a:rPr dirty="0"/>
+              <a:t>Cons: more upfront wiring — server must support paging + filter + sort params</a:t>
             </a:r>
           </a:p>
         </p:txBody>
@@ -6460,6 +6629,7 @@
           <a:lstStyle/>
           <a:p>
             <a:pPr algn="ctr"/>
+            <a:endParaRPr/>
           </a:p>
         </p:txBody>
       </p:sp>
@@ -6503,6 +6673,7 @@
           <a:lstStyle/>
           <a:p>
             <a:pPr algn="ctr"/>
+            <a:endParaRPr/>
           </a:p>
         </p:txBody>
       </p:sp>
@@ -6536,7 +6707,7 @@
               </a:defRPr>
             </a:pPr>
             <a:r>
-              <a:t>Express API Demo  ·  5 / 11</a:t>
+              <a:t>Paging, Filtering, and API Docs  ·  5 / 11</a:t>
             </a:r>
           </a:p>
         </p:txBody>
@@ -6581,6 +6752,7 @@
           <a:lstStyle/>
           <a:p>
             <a:pPr algn="ctr"/>
+            <a:endParaRPr/>
           </a:p>
         </p:txBody>
       </p:sp>
@@ -6593,7 +6765,7 @@
 </file>
 
 <file path=ppt/slides/slide6.xml><?xml version="1.0" encoding="utf-8"?>
-<p:sld xmlns:a="http://schemas.openxmlformats.org/drawingml/2006/main" xmlns:p="http://schemas.openxmlformats.org/presentationml/2006/main" xmlns:r="http://schemas.openxmlformats.org/officeDocument/2006/relationships">
+<p:sld xmlns:a="http://schemas.openxmlformats.org/drawingml/2006/main" xmlns:r="http://schemas.openxmlformats.org/officeDocument/2006/relationships" xmlns:p="http://schemas.openxmlformats.org/presentationml/2006/main">
   <p:cSld>
     <p:spTree>
       <p:nvGrpSpPr>
@@ -6601,7 +6773,14 @@
         <p:cNvGrpSpPr/>
         <p:nvPr/>
       </p:nvGrpSpPr>
-      <p:grpSpPr/>
+      <p:grpSpPr>
+        <a:xfrm>
+          <a:off x="0" y="0"/>
+          <a:ext cx="0" cy="0"/>
+          <a:chOff x="0" y="0"/>
+          <a:chExt cx="0" cy="0"/>
+        </a:xfrm>
+      </p:grpSpPr>
       <p:sp>
         <p:nvSpPr>
           <p:cNvPr id="2" name="TextBox 1"/>
@@ -6677,6 +6856,7 @@
           <a:lstStyle/>
           <a:p>
             <a:pPr algn="ctr"/>
+            <a:endParaRPr/>
           </a:p>
         </p:txBody>
       </p:sp>
@@ -6720,6 +6900,7 @@
           <a:lstStyle/>
           <a:p>
             <a:pPr algn="ctr"/>
+            <a:endParaRPr/>
           </a:p>
         </p:txBody>
       </p:sp>
@@ -6767,7 +6948,7 @@
         <p:spPr>
           <a:xfrm>
             <a:off x="548640" y="1737360"/>
-            <a:ext cx="73152" cy="2286000"/>
+            <a:ext cx="73152" cy="1737360"/>
           </a:xfrm>
           <a:prstGeom prst="rect">
             <a:avLst/>
@@ -6798,6 +6979,7 @@
           <a:lstStyle/>
           <a:p>
             <a:pPr algn="ctr"/>
+            <a:endParaRPr/>
           </a:p>
         </p:txBody>
       </p:sp>
@@ -6810,7 +6992,7 @@
         <p:spPr>
           <a:xfrm>
             <a:off x="548640" y="1737360"/>
-            <a:ext cx="10972800" cy="2286000"/>
+            <a:ext cx="10972800" cy="1737360"/>
           </a:xfrm>
           <a:prstGeom prst="rect">
             <a:avLst/>
@@ -6825,7 +7007,7 @@
           </a:ln>
         </p:spPr>
         <p:txBody>
-          <a:bodyPr wrap="square" lIns="274320" rIns="182880" tIns="182880" bIns="137160">
+          <a:bodyPr wrap="square" lIns="274320" tIns="182880" rIns="182880" bIns="137160">
             <a:spAutoFit/>
           </a:bodyPr>
           <a:lstStyle/>
@@ -6951,7 +7133,7 @@
         </p:nvSpPr>
         <p:spPr>
           <a:xfrm>
-            <a:off x="548640" y="4297680"/>
+            <a:off x="548640" y="3657600"/>
             <a:ext cx="10972800" cy="4937760"/>
           </a:xfrm>
           <a:prstGeom prst="rect">
@@ -6969,14 +7151,14 @@
               <a:spcAft>
                 <a:spcPts val="800"/>
               </a:spcAft>
-              <a:defRPr sz="1800">
-                <a:solidFill>
-                  <a:srgbClr val="1B2631"/>
-                </a:solidFill>
-              </a:defRPr>
-            </a:pPr>
-            <a:r>
-              <a:t>Per-combination cache → revisits are instant; stale-while-revalidate in the background</a:t>
+              <a:defRPr sz="1400">
+                <a:solidFill>
+                  <a:srgbClr val="1B2631"/>
+                </a:solidFill>
+              </a:defRPr>
+            </a:pPr>
+            <a:r>
+              <a:t>useQuery fetches and caches by queryKey</a:t>
             </a:r>
           </a:p>
           <a:p>
@@ -6984,14 +7166,14 @@
               <a:spcAft>
                 <a:spcPts val="800"/>
               </a:spcAft>
-              <a:defRPr sz="1800">
-                <a:solidFill>
-                  <a:srgbClr val="1B2631"/>
-                </a:solidFill>
-              </a:defRPr>
-            </a:pPr>
-            <a:r>
-              <a:t>keepPreviousData → no flicker between pages while the next batch loads</a:t>
+              <a:defRPr sz="1400">
+                <a:solidFill>
+                  <a:srgbClr val="1B2631"/>
+                </a:solidFill>
+              </a:defRPr>
+            </a:pPr>
+            <a:r>
+              <a:t>While any component subscribes → entry is "active"</a:t>
             </a:r>
           </a:p>
           <a:p>
@@ -6999,14 +7181,14 @@
               <a:spcAft>
                 <a:spcPts val="800"/>
               </a:spcAft>
-              <a:defRPr sz="1800">
-                <a:solidFill>
-                  <a:srgbClr val="1B2631"/>
-                </a:solidFill>
-              </a:defRPr>
-            </a:pPr>
-            <a:r>
-              <a:t>Local interactions on /todos don't refetch (only q is in its queryKey)</a:t>
+              <a:defRPr sz="1400">
+                <a:solidFill>
+                  <a:srgbClr val="1B2631"/>
+                </a:solidFill>
+              </a:defRPr>
+            </a:pPr>
+            <a:r>
+              <a:t>All subscribers unmount → entry becomes "inactive" (but stays cached)</a:t>
             </a:r>
           </a:p>
           <a:p>
@@ -7014,14 +7196,74 @@
               <a:spcAft>
                 <a:spcPts val="800"/>
               </a:spcAft>
-              <a:defRPr sz="1800">
-                <a:solidFill>
-                  <a:srgbClr val="1B2631"/>
-                </a:solidFill>
-              </a:defRPr>
-            </a:pPr>
-            <a:r>
-              <a:t>Default gcTime (5 min) drops unused entries automatically</a:t>
+              <a:defRPr sz="1400">
+                <a:solidFill>
+                  <a:srgbClr val="1B2631"/>
+                </a:solidFill>
+              </a:defRPr>
+            </a:pPr>
+            <a:r>
+              <a:t>gcTime (cacheTime) timer starts; after 5 min of inactivity → entry is dropped</a:t>
+            </a:r>
+          </a:p>
+          <a:p>
+            <a:pPr>
+              <a:spcAft>
+                <a:spcPts val="800"/>
+              </a:spcAft>
+              <a:defRPr sz="1400">
+                <a:solidFill>
+                  <a:srgbClr val="1B2631"/>
+                </a:solidFill>
+              </a:defRPr>
+            </a:pPr>
+            <a:r>
+              <a:t>Re-subscribe within 5 min → instant render from cache, background refetch</a:t>
+            </a:r>
+          </a:p>
+          <a:p>
+            <a:pPr>
+              <a:spcAft>
+                <a:spcPts val="800"/>
+              </a:spcAft>
+              <a:defRPr sz="1400">
+                <a:solidFill>
+                  <a:srgbClr val="1B2631"/>
+                </a:solidFill>
+              </a:defRPr>
+            </a:pPr>
+            <a:r>
+              <a:t>Per-combination cache → revisits are instant; stale-while-revalidate</a:t>
+            </a:r>
+          </a:p>
+          <a:p>
+            <a:pPr>
+              <a:spcAft>
+                <a:spcPts val="800"/>
+              </a:spcAft>
+              <a:defRPr sz="1400">
+                <a:solidFill>
+                  <a:srgbClr val="1B2631"/>
+                </a:solidFill>
+              </a:defRPr>
+            </a:pPr>
+            <a:r>
+              <a:t>keepPreviousData → no flicker between pages while the next batch loads</a:t>
+            </a:r>
+          </a:p>
+          <a:p>
+            <a:pPr>
+              <a:spcAft>
+                <a:spcPts val="800"/>
+              </a:spcAft>
+              <a:defRPr sz="1400">
+                <a:solidFill>
+                  <a:srgbClr val="1B2631"/>
+                </a:solidFill>
+              </a:defRPr>
+            </a:pPr>
+            <a:r>
+              <a:t>Local interactions on /todos-client don't refetch (only q is in its queryKey)</a:t>
             </a:r>
           </a:p>
         </p:txBody>
@@ -7066,6 +7308,7 @@
           <a:lstStyle/>
           <a:p>
             <a:pPr algn="ctr"/>
+            <a:endParaRPr/>
           </a:p>
         </p:txBody>
       </p:sp>
@@ -7109,6 +7352,7 @@
           <a:lstStyle/>
           <a:p>
             <a:pPr algn="ctr"/>
+            <a:endParaRPr/>
           </a:p>
         </p:txBody>
       </p:sp>
@@ -7142,7 +7386,7 @@
               </a:defRPr>
             </a:pPr>
             <a:r>
-              <a:t>Express API Demo  ·  6 / 11</a:t>
+              <a:t>Paging, Filtering, and API Docs  ·  6 / 11</a:t>
             </a:r>
           </a:p>
         </p:txBody>
@@ -7187,6 +7431,7 @@
           <a:lstStyle/>
           <a:p>
             <a:pPr algn="ctr"/>
+            <a:endParaRPr/>
           </a:p>
         </p:txBody>
       </p:sp>
@@ -7199,7 +7444,7 @@
 </file>
 
 <file path=ppt/slides/slide7.xml><?xml version="1.0" encoding="utf-8"?>
-<p:sld xmlns:a="http://schemas.openxmlformats.org/drawingml/2006/main" xmlns:p="http://schemas.openxmlformats.org/presentationml/2006/main" xmlns:r="http://schemas.openxmlformats.org/officeDocument/2006/relationships">
+<p:sld xmlns:a="http://schemas.openxmlformats.org/drawingml/2006/main" xmlns:r="http://schemas.openxmlformats.org/officeDocument/2006/relationships" xmlns:p="http://schemas.openxmlformats.org/presentationml/2006/main">
   <p:cSld>
     <p:spTree>
       <p:nvGrpSpPr>
@@ -7207,7 +7452,14 @@
         <p:cNvGrpSpPr/>
         <p:nvPr/>
       </p:nvGrpSpPr>
-      <p:grpSpPr/>
+      <p:grpSpPr>
+        <a:xfrm>
+          <a:off x="0" y="0"/>
+          <a:ext cx="0" cy="0"/>
+          <a:chOff x="0" y="0"/>
+          <a:chExt cx="0" cy="0"/>
+        </a:xfrm>
+      </p:grpSpPr>
       <p:sp>
         <p:nvSpPr>
           <p:cNvPr id="2" name="TextBox 1"/>
@@ -7283,6 +7535,7 @@
           <a:lstStyle/>
           <a:p>
             <a:pPr algn="ctr"/>
+            <a:endParaRPr/>
           </a:p>
         </p:txBody>
       </p:sp>
@@ -7326,6 +7579,7 @@
           <a:lstStyle/>
           <a:p>
             <a:pPr algn="ctr"/>
+            <a:endParaRPr/>
           </a:p>
         </p:txBody>
       </p:sp>
@@ -7456,6 +7710,7 @@
                 </a:solidFill>
               </a:defRPr>
             </a:pPr>
+            <a:endParaRPr/>
           </a:p>
           <a:p>
             <a:pPr>
@@ -7514,6 +7769,7 @@
           <a:lstStyle/>
           <a:p>
             <a:pPr algn="ctr"/>
+            <a:endParaRPr/>
           </a:p>
         </p:txBody>
       </p:sp>
@@ -7557,6 +7813,7 @@
           <a:lstStyle/>
           <a:p>
             <a:pPr algn="ctr"/>
+            <a:endParaRPr/>
           </a:p>
         </p:txBody>
       </p:sp>
@@ -7590,7 +7847,7 @@
               </a:defRPr>
             </a:pPr>
             <a:r>
-              <a:t>Express API Demo  ·  7 / 11</a:t>
+              <a:t>Paging, Filtering, and API Docs  ·  7 / 11</a:t>
             </a:r>
           </a:p>
         </p:txBody>
@@ -7635,6 +7892,7 @@
           <a:lstStyle/>
           <a:p>
             <a:pPr algn="ctr"/>
+            <a:endParaRPr/>
           </a:p>
         </p:txBody>
       </p:sp>
@@ -7647,7 +7905,7 @@
 </file>
 
 <file path=ppt/slides/slide8.xml><?xml version="1.0" encoding="utf-8"?>
-<p:sld xmlns:a="http://schemas.openxmlformats.org/drawingml/2006/main" xmlns:p="http://schemas.openxmlformats.org/presentationml/2006/main" xmlns:r="http://schemas.openxmlformats.org/officeDocument/2006/relationships">
+<p:sld xmlns:a="http://schemas.openxmlformats.org/drawingml/2006/main" xmlns:r="http://schemas.openxmlformats.org/officeDocument/2006/relationships" xmlns:p="http://schemas.openxmlformats.org/presentationml/2006/main">
   <p:cSld>
     <p:spTree>
       <p:nvGrpSpPr>
@@ -7655,7 +7913,14 @@
         <p:cNvGrpSpPr/>
         <p:nvPr/>
       </p:nvGrpSpPr>
-      <p:grpSpPr/>
+      <p:grpSpPr>
+        <a:xfrm>
+          <a:off x="0" y="0"/>
+          <a:ext cx="0" cy="0"/>
+          <a:chOff x="0" y="0"/>
+          <a:chExt cx="0" cy="0"/>
+        </a:xfrm>
+      </p:grpSpPr>
       <p:sp>
         <p:nvSpPr>
           <p:cNvPr id="2" name="TextBox 1"/>
@@ -7731,6 +7996,7 @@
           <a:lstStyle/>
           <a:p>
             <a:pPr algn="ctr"/>
+            <a:endParaRPr/>
           </a:p>
         </p:txBody>
       </p:sp>
@@ -7774,6 +8040,7 @@
           <a:lstStyle/>
           <a:p>
             <a:pPr algn="ctr"/>
+            <a:endParaRPr/>
           </a:p>
         </p:txBody>
       </p:sp>
@@ -7852,6 +8119,7 @@
           <a:lstStyle/>
           <a:p>
             <a:pPr algn="ctr"/>
+            <a:endParaRPr/>
           </a:p>
         </p:txBody>
       </p:sp>
@@ -7879,7 +8147,7 @@
           </a:ln>
         </p:spPr>
         <p:txBody>
-          <a:bodyPr wrap="square" lIns="274320" rIns="182880" tIns="182880" bIns="137160">
+          <a:bodyPr wrap="square" lIns="274320" tIns="182880" rIns="182880" bIns="137160">
             <a:spAutoFit/>
           </a:bodyPr>
           <a:lstStyle/>
@@ -8086,6 +8354,7 @@
           <a:lstStyle/>
           <a:p>
             <a:pPr algn="ctr"/>
+            <a:endParaRPr/>
           </a:p>
         </p:txBody>
       </p:sp>
@@ -8129,6 +8398,7 @@
           <a:lstStyle/>
           <a:p>
             <a:pPr algn="ctr"/>
+            <a:endParaRPr/>
           </a:p>
         </p:txBody>
       </p:sp>
@@ -8162,7 +8432,7 @@
               </a:defRPr>
             </a:pPr>
             <a:r>
-              <a:t>Express API Demo  ·  8 / 11</a:t>
+              <a:t>Paging, Filtering, and API Docs  ·  8 / 11</a:t>
             </a:r>
           </a:p>
         </p:txBody>
@@ -8207,6 +8477,7 @@
           <a:lstStyle/>
           <a:p>
             <a:pPr algn="ctr"/>
+            <a:endParaRPr/>
           </a:p>
         </p:txBody>
       </p:sp>
@@ -8219,7 +8490,7 @@
 </file>
 
 <file path=ppt/slides/slide9.xml><?xml version="1.0" encoding="utf-8"?>
-<p:sld xmlns:a="http://schemas.openxmlformats.org/drawingml/2006/main" xmlns:p="http://schemas.openxmlformats.org/presentationml/2006/main" xmlns:r="http://schemas.openxmlformats.org/officeDocument/2006/relationships">
+<p:sld xmlns:a="http://schemas.openxmlformats.org/drawingml/2006/main" xmlns:r="http://schemas.openxmlformats.org/officeDocument/2006/relationships" xmlns:p="http://schemas.openxmlformats.org/presentationml/2006/main">
   <p:cSld>
     <p:spTree>
       <p:nvGrpSpPr>
@@ -8227,7 +8498,14 @@
         <p:cNvGrpSpPr/>
         <p:nvPr/>
       </p:nvGrpSpPr>
-      <p:grpSpPr/>
+      <p:grpSpPr>
+        <a:xfrm>
+          <a:off x="0" y="0"/>
+          <a:ext cx="0" cy="0"/>
+          <a:chOff x="0" y="0"/>
+          <a:chExt cx="0" cy="0"/>
+        </a:xfrm>
+      </p:grpSpPr>
       <p:sp>
         <p:nvSpPr>
           <p:cNvPr id="2" name="TextBox 1"/>
@@ -8303,6 +8581,7 @@
           <a:lstStyle/>
           <a:p>
             <a:pPr algn="ctr"/>
+            <a:endParaRPr/>
           </a:p>
         </p:txBody>
       </p:sp>
@@ -8346,6 +8625,7 @@
           <a:lstStyle/>
           <a:p>
             <a:pPr algn="ctr"/>
+            <a:endParaRPr/>
           </a:p>
         </p:txBody>
       </p:sp>
@@ -8426,6 +8706,7 @@
                 </a:solidFill>
               </a:defRPr>
             </a:pPr>
+            <a:endParaRPr/>
           </a:p>
           <a:p>
             <a:pPr>
@@ -8483,6 +8764,7 @@
                 </a:solidFill>
               </a:defRPr>
             </a:pPr>
+            <a:endParaRPr/>
           </a:p>
           <a:p>
             <a:pPr>
@@ -8541,6 +8823,7 @@
           <a:lstStyle/>
           <a:p>
             <a:pPr algn="ctr"/>
+            <a:endParaRPr/>
           </a:p>
         </p:txBody>
       </p:sp>
@@ -8584,6 +8867,7 @@
           <a:lstStyle/>
           <a:p>
             <a:pPr algn="ctr"/>
+            <a:endParaRPr/>
           </a:p>
         </p:txBody>
       </p:sp>
@@ -8617,7 +8901,7 @@
               </a:defRPr>
             </a:pPr>
             <a:r>
-              <a:t>Express API Demo  ·  9 / 11</a:t>
+              <a:t>Paging, Filtering, and API Docs  ·  9 / 11</a:t>
             </a:r>
           </a:p>
         </p:txBody>
@@ -8662,6 +8946,7 @@
           <a:lstStyle/>
           <a:p>
             <a:pPr algn="ctr"/>
+            <a:endParaRPr/>
           </a:p>
         </p:txBody>
       </p:sp>

--- a/demo.pptx
+++ b/demo.pptx
@@ -5,19 +5,19 @@
     <p:sldMasterId id="2147483648" r:id="rId1"/>
   </p:sldMasterIdLst>
   <p:sldIdLst>
-    <p:sldId id="256" r:id="rId2"/>
-    <p:sldId id="257" r:id="rId3"/>
-    <p:sldId id="258" r:id="rId4"/>
-    <p:sldId id="259" r:id="rId5"/>
-    <p:sldId id="260" r:id="rId6"/>
-    <p:sldId id="261" r:id="rId7"/>
-    <p:sldId id="262" r:id="rId8"/>
-    <p:sldId id="263" r:id="rId9"/>
-    <p:sldId id="264" r:id="rId10"/>
-    <p:sldId id="265" r:id="rId11"/>
-    <p:sldId id="266" r:id="rId12"/>
+    <p:sldId id="256" r:id="rId7"/>
+    <p:sldId id="257" r:id="rId8"/>
+    <p:sldId id="258" r:id="rId9"/>
+    <p:sldId id="259" r:id="rId10"/>
+    <p:sldId id="260" r:id="rId11"/>
+    <p:sldId id="261" r:id="rId12"/>
+    <p:sldId id="262" r:id="rId13"/>
+    <p:sldId id="263" r:id="rId14"/>
+    <p:sldId id="264" r:id="rId15"/>
+    <p:sldId id="265" r:id="rId16"/>
+    <p:sldId id="266" r:id="rId17"/>
   </p:sldIdLst>
-  <p:sldSz cx="12192000" cy="6858000"/>
+  <p:sldSz cx="12191695" cy="6858000" type="screen4x3"/>
   <p:notesSz cx="6858000" cy="9144000"/>
   <p:defaultTextStyle>
     <a:defPPr>
@@ -114,22 +114,6 @@
       </a:defRPr>
     </a:lvl9pPr>
   </p:defaultTextStyle>
-  <p:extLst>
-    <p:ext uri="{EFAFB233-063F-42B5-8137-9DF3F51BA10A}">
-      <p15:sldGuideLst xmlns:p15="http://schemas.microsoft.com/office/powerpoint/2012/main">
-        <p15:guide id="1" orient="horz" pos="2160">
-          <p15:clr>
-            <a:srgbClr val="A4A3A4"/>
-          </p15:clr>
-        </p15:guide>
-        <p15:guide id="2" pos="2880">
-          <p15:clr>
-            <a:srgbClr val="A4A3A4"/>
-          </p15:clr>
-        </p15:guide>
-      </p15:sldGuideLst>
-    </p:ext>
-  </p:extLst>
 </p:presentation>
 </file>
 
@@ -171,9 +155,10 @@
           <a:lstStyle/>
           <a:p>
             <a:r>
-              <a:rPr lang="en-US"/>
+              <a:rPr lang="en-US" smtClean="0"/>
               <a:t>Click to edit Master title style</a:t>
             </a:r>
+            <a:endParaRPr lang="en-US"/>
           </a:p>
         </p:txBody>
       </p:sp>
@@ -289,9 +274,10 @@
           </a:lstStyle>
           <a:p>
             <a:r>
-              <a:rPr lang="en-US"/>
+              <a:rPr lang="en-US" smtClean="0"/>
               <a:t>Click to edit Master subtitle style</a:t>
             </a:r>
+            <a:endParaRPr lang="en-US"/>
           </a:p>
         </p:txBody>
       </p:sp>
@@ -312,7 +298,7 @@
           <a:p>
             <a:fld id="{5BCAD085-E8A6-8845-BD4E-CB4CCA059FC4}" type="datetimeFigureOut">
               <a:rPr lang="en-US" smtClean="0"/>
-              <a:t>5/7/2026</a:t>
+              <a:t>1/27/13</a:t>
             </a:fld>
             <a:endParaRPr lang="en-US"/>
           </a:p>
@@ -406,9 +392,10 @@
           <a:lstStyle/>
           <a:p>
             <a:r>
-              <a:rPr lang="en-US"/>
+              <a:rPr lang="en-US" smtClean="0"/>
               <a:t>Click to edit Master title style</a:t>
             </a:r>
+            <a:endParaRPr lang="en-US"/>
           </a:p>
         </p:txBody>
       </p:sp>
@@ -429,37 +416,38 @@
           <a:p>
             <a:pPr lvl="0"/>
             <a:r>
-              <a:rPr lang="en-US"/>
+              <a:rPr lang="en-US" smtClean="0"/>
               <a:t>Click to edit Master text styles</a:t>
             </a:r>
           </a:p>
           <a:p>
             <a:pPr lvl="1"/>
             <a:r>
-              <a:rPr lang="en-US"/>
+              <a:rPr lang="en-US" smtClean="0"/>
               <a:t>Second level</a:t>
             </a:r>
           </a:p>
           <a:p>
             <a:pPr lvl="2"/>
             <a:r>
-              <a:rPr lang="en-US"/>
+              <a:rPr lang="en-US" smtClean="0"/>
               <a:t>Third level</a:t>
             </a:r>
           </a:p>
           <a:p>
             <a:pPr lvl="3"/>
             <a:r>
-              <a:rPr lang="en-US"/>
+              <a:rPr lang="en-US" smtClean="0"/>
               <a:t>Fourth level</a:t>
             </a:r>
           </a:p>
           <a:p>
             <a:pPr lvl="4"/>
             <a:r>
-              <a:rPr lang="en-US"/>
+              <a:rPr lang="en-US" smtClean="0"/>
               <a:t>Fifth level</a:t>
             </a:r>
+            <a:endParaRPr lang="en-US"/>
           </a:p>
         </p:txBody>
       </p:sp>
@@ -480,7 +468,7 @@
           <a:p>
             <a:fld id="{5BCAD085-E8A6-8845-BD4E-CB4CCA059FC4}" type="datetimeFigureOut">
               <a:rPr lang="en-US" smtClean="0"/>
-              <a:t>5/7/2026</a:t>
+              <a:t>1/27/13</a:t>
             </a:fld>
             <a:endParaRPr lang="en-US"/>
           </a:p>
@@ -579,9 +567,10 @@
           <a:lstStyle/>
           <a:p>
             <a:r>
-              <a:rPr lang="en-US"/>
+              <a:rPr lang="en-US" smtClean="0"/>
               <a:t>Click to edit Master title style</a:t>
             </a:r>
+            <a:endParaRPr lang="en-US"/>
           </a:p>
         </p:txBody>
       </p:sp>
@@ -607,37 +596,38 @@
           <a:p>
             <a:pPr lvl="0"/>
             <a:r>
-              <a:rPr lang="en-US"/>
+              <a:rPr lang="en-US" smtClean="0"/>
               <a:t>Click to edit Master text styles</a:t>
             </a:r>
           </a:p>
           <a:p>
             <a:pPr lvl="1"/>
             <a:r>
-              <a:rPr lang="en-US"/>
+              <a:rPr lang="en-US" smtClean="0"/>
               <a:t>Second level</a:t>
             </a:r>
           </a:p>
           <a:p>
             <a:pPr lvl="2"/>
             <a:r>
-              <a:rPr lang="en-US"/>
+              <a:rPr lang="en-US" smtClean="0"/>
               <a:t>Third level</a:t>
             </a:r>
           </a:p>
           <a:p>
             <a:pPr lvl="3"/>
             <a:r>
-              <a:rPr lang="en-US"/>
+              <a:rPr lang="en-US" smtClean="0"/>
               <a:t>Fourth level</a:t>
             </a:r>
           </a:p>
           <a:p>
             <a:pPr lvl="4"/>
             <a:r>
-              <a:rPr lang="en-US"/>
+              <a:rPr lang="en-US" smtClean="0"/>
               <a:t>Fifth level</a:t>
             </a:r>
+            <a:endParaRPr lang="en-US"/>
           </a:p>
         </p:txBody>
       </p:sp>
@@ -658,7 +648,7 @@
           <a:p>
             <a:fld id="{5BCAD085-E8A6-8845-BD4E-CB4CCA059FC4}" type="datetimeFigureOut">
               <a:rPr lang="en-US" smtClean="0"/>
-              <a:t>5/7/2026</a:t>
+              <a:t>1/27/13</a:t>
             </a:fld>
             <a:endParaRPr lang="en-US"/>
           </a:p>
@@ -752,9 +742,10 @@
           <a:lstStyle/>
           <a:p>
             <a:r>
-              <a:rPr lang="en-US"/>
+              <a:rPr lang="en-US" smtClean="0"/>
               <a:t>Click to edit Master title style</a:t>
             </a:r>
+            <a:endParaRPr lang="en-US"/>
           </a:p>
         </p:txBody>
       </p:sp>
@@ -775,37 +766,38 @@
           <a:p>
             <a:pPr lvl="0"/>
             <a:r>
-              <a:rPr lang="en-US"/>
+              <a:rPr lang="en-US" smtClean="0"/>
               <a:t>Click to edit Master text styles</a:t>
             </a:r>
           </a:p>
           <a:p>
             <a:pPr lvl="1"/>
             <a:r>
-              <a:rPr lang="en-US"/>
+              <a:rPr lang="en-US" smtClean="0"/>
               <a:t>Second level</a:t>
             </a:r>
           </a:p>
           <a:p>
             <a:pPr lvl="2"/>
             <a:r>
-              <a:rPr lang="en-US"/>
+              <a:rPr lang="en-US" smtClean="0"/>
               <a:t>Third level</a:t>
             </a:r>
           </a:p>
           <a:p>
             <a:pPr lvl="3"/>
             <a:r>
-              <a:rPr lang="en-US"/>
+              <a:rPr lang="en-US" smtClean="0"/>
               <a:t>Fourth level</a:t>
             </a:r>
           </a:p>
           <a:p>
             <a:pPr lvl="4"/>
             <a:r>
-              <a:rPr lang="en-US"/>
+              <a:rPr lang="en-US" smtClean="0"/>
               <a:t>Fifth level</a:t>
             </a:r>
+            <a:endParaRPr lang="en-US"/>
           </a:p>
         </p:txBody>
       </p:sp>
@@ -826,7 +818,7 @@
           <a:p>
             <a:fld id="{5BCAD085-E8A6-8845-BD4E-CB4CCA059FC4}" type="datetimeFigureOut">
               <a:rPr lang="en-US" smtClean="0"/>
-              <a:t>5/7/2026</a:t>
+              <a:t>1/27/13</a:t>
             </a:fld>
             <a:endParaRPr lang="en-US"/>
           </a:p>
@@ -929,9 +921,10 @@
           </a:lstStyle>
           <a:p>
             <a:r>
-              <a:rPr lang="en-US"/>
+              <a:rPr lang="en-US" smtClean="0"/>
               <a:t>Click to edit Master title style</a:t>
             </a:r>
+            <a:endParaRPr lang="en-US"/>
           </a:p>
         </p:txBody>
       </p:sp>
@@ -1048,7 +1041,7 @@
           <a:p>
             <a:pPr lvl="0"/>
             <a:r>
-              <a:rPr lang="en-US"/>
+              <a:rPr lang="en-US" smtClean="0"/>
               <a:t>Click to edit Master text styles</a:t>
             </a:r>
           </a:p>
@@ -1071,7 +1064,7 @@
           <a:p>
             <a:fld id="{5BCAD085-E8A6-8845-BD4E-CB4CCA059FC4}" type="datetimeFigureOut">
               <a:rPr lang="en-US" smtClean="0"/>
-              <a:t>5/7/2026</a:t>
+              <a:t>1/27/13</a:t>
             </a:fld>
             <a:endParaRPr lang="en-US"/>
           </a:p>
@@ -1165,9 +1158,10 @@
           <a:lstStyle/>
           <a:p>
             <a:r>
-              <a:rPr lang="en-US"/>
+              <a:rPr lang="en-US" smtClean="0"/>
               <a:t>Click to edit Master title style</a:t>
             </a:r>
+            <a:endParaRPr lang="en-US"/>
           </a:p>
         </p:txBody>
       </p:sp>
@@ -1221,37 +1215,38 @@
           <a:p>
             <a:pPr lvl="0"/>
             <a:r>
-              <a:rPr lang="en-US"/>
+              <a:rPr lang="en-US" smtClean="0"/>
               <a:t>Click to edit Master text styles</a:t>
             </a:r>
           </a:p>
           <a:p>
             <a:pPr lvl="1"/>
             <a:r>
-              <a:rPr lang="en-US"/>
+              <a:rPr lang="en-US" smtClean="0"/>
               <a:t>Second level</a:t>
             </a:r>
           </a:p>
           <a:p>
             <a:pPr lvl="2"/>
             <a:r>
-              <a:rPr lang="en-US"/>
+              <a:rPr lang="en-US" smtClean="0"/>
               <a:t>Third level</a:t>
             </a:r>
           </a:p>
           <a:p>
             <a:pPr lvl="3"/>
             <a:r>
-              <a:rPr lang="en-US"/>
+              <a:rPr lang="en-US" smtClean="0"/>
               <a:t>Fourth level</a:t>
             </a:r>
           </a:p>
           <a:p>
             <a:pPr lvl="4"/>
             <a:r>
-              <a:rPr lang="en-US"/>
+              <a:rPr lang="en-US" smtClean="0"/>
               <a:t>Fifth level</a:t>
             </a:r>
+            <a:endParaRPr lang="en-US"/>
           </a:p>
         </p:txBody>
       </p:sp>
@@ -1305,37 +1300,38 @@
           <a:p>
             <a:pPr lvl="0"/>
             <a:r>
-              <a:rPr lang="en-US"/>
+              <a:rPr lang="en-US" smtClean="0"/>
               <a:t>Click to edit Master text styles</a:t>
             </a:r>
           </a:p>
           <a:p>
             <a:pPr lvl="1"/>
             <a:r>
-              <a:rPr lang="en-US"/>
+              <a:rPr lang="en-US" smtClean="0"/>
               <a:t>Second level</a:t>
             </a:r>
           </a:p>
           <a:p>
             <a:pPr lvl="2"/>
             <a:r>
-              <a:rPr lang="en-US"/>
+              <a:rPr lang="en-US" smtClean="0"/>
               <a:t>Third level</a:t>
             </a:r>
           </a:p>
           <a:p>
             <a:pPr lvl="3"/>
             <a:r>
-              <a:rPr lang="en-US"/>
+              <a:rPr lang="en-US" smtClean="0"/>
               <a:t>Fourth level</a:t>
             </a:r>
           </a:p>
           <a:p>
             <a:pPr lvl="4"/>
             <a:r>
-              <a:rPr lang="en-US"/>
+              <a:rPr lang="en-US" smtClean="0"/>
               <a:t>Fifth level</a:t>
             </a:r>
+            <a:endParaRPr lang="en-US"/>
           </a:p>
         </p:txBody>
       </p:sp>
@@ -1356,7 +1352,7 @@
           <a:p>
             <a:fld id="{5BCAD085-E8A6-8845-BD4E-CB4CCA059FC4}" type="datetimeFigureOut">
               <a:rPr lang="en-US" smtClean="0"/>
-              <a:t>5/7/2026</a:t>
+              <a:t>1/27/13</a:t>
             </a:fld>
             <a:endParaRPr lang="en-US"/>
           </a:p>
@@ -1454,9 +1450,10 @@
           </a:lstStyle>
           <a:p>
             <a:r>
-              <a:rPr lang="en-US"/>
+              <a:rPr lang="en-US" smtClean="0"/>
               <a:t>Click to edit Master title style</a:t>
             </a:r>
+            <a:endParaRPr lang="en-US"/>
           </a:p>
         </p:txBody>
       </p:sp>
@@ -1519,7 +1516,7 @@
           <a:p>
             <a:pPr lvl="0"/>
             <a:r>
-              <a:rPr lang="en-US"/>
+              <a:rPr lang="en-US" smtClean="0"/>
               <a:t>Click to edit Master text styles</a:t>
             </a:r>
           </a:p>
@@ -1575,37 +1572,38 @@
           <a:p>
             <a:pPr lvl="0"/>
             <a:r>
-              <a:rPr lang="en-US"/>
+              <a:rPr lang="en-US" smtClean="0"/>
               <a:t>Click to edit Master text styles</a:t>
             </a:r>
           </a:p>
           <a:p>
             <a:pPr lvl="1"/>
             <a:r>
-              <a:rPr lang="en-US"/>
+              <a:rPr lang="en-US" smtClean="0"/>
               <a:t>Second level</a:t>
             </a:r>
           </a:p>
           <a:p>
             <a:pPr lvl="2"/>
             <a:r>
-              <a:rPr lang="en-US"/>
+              <a:rPr lang="en-US" smtClean="0"/>
               <a:t>Third level</a:t>
             </a:r>
           </a:p>
           <a:p>
             <a:pPr lvl="3"/>
             <a:r>
-              <a:rPr lang="en-US"/>
+              <a:rPr lang="en-US" smtClean="0"/>
               <a:t>Fourth level</a:t>
             </a:r>
           </a:p>
           <a:p>
             <a:pPr lvl="4"/>
             <a:r>
-              <a:rPr lang="en-US"/>
+              <a:rPr lang="en-US" smtClean="0"/>
               <a:t>Fifth level</a:t>
             </a:r>
+            <a:endParaRPr lang="en-US"/>
           </a:p>
         </p:txBody>
       </p:sp>
@@ -1668,7 +1666,7 @@
           <a:p>
             <a:pPr lvl="0"/>
             <a:r>
-              <a:rPr lang="en-US"/>
+              <a:rPr lang="en-US" smtClean="0"/>
               <a:t>Click to edit Master text styles</a:t>
             </a:r>
           </a:p>
@@ -1724,37 +1722,38 @@
           <a:p>
             <a:pPr lvl="0"/>
             <a:r>
-              <a:rPr lang="en-US"/>
+              <a:rPr lang="en-US" smtClean="0"/>
               <a:t>Click to edit Master text styles</a:t>
             </a:r>
           </a:p>
           <a:p>
             <a:pPr lvl="1"/>
             <a:r>
-              <a:rPr lang="en-US"/>
+              <a:rPr lang="en-US" smtClean="0"/>
               <a:t>Second level</a:t>
             </a:r>
           </a:p>
           <a:p>
             <a:pPr lvl="2"/>
             <a:r>
-              <a:rPr lang="en-US"/>
+              <a:rPr lang="en-US" smtClean="0"/>
               <a:t>Third level</a:t>
             </a:r>
           </a:p>
           <a:p>
             <a:pPr lvl="3"/>
             <a:r>
-              <a:rPr lang="en-US"/>
+              <a:rPr lang="en-US" smtClean="0"/>
               <a:t>Fourth level</a:t>
             </a:r>
           </a:p>
           <a:p>
             <a:pPr lvl="4"/>
             <a:r>
-              <a:rPr lang="en-US"/>
+              <a:rPr lang="en-US" smtClean="0"/>
               <a:t>Fifth level</a:t>
             </a:r>
+            <a:endParaRPr lang="en-US"/>
           </a:p>
         </p:txBody>
       </p:sp>
@@ -1775,7 +1774,7 @@
           <a:p>
             <a:fld id="{5BCAD085-E8A6-8845-BD4E-CB4CCA059FC4}" type="datetimeFigureOut">
               <a:rPr lang="en-US" smtClean="0"/>
-              <a:t>5/7/2026</a:t>
+              <a:t>1/27/13</a:t>
             </a:fld>
             <a:endParaRPr lang="en-US"/>
           </a:p>
@@ -1869,9 +1868,10 @@
           <a:lstStyle/>
           <a:p>
             <a:r>
-              <a:rPr lang="en-US"/>
+              <a:rPr lang="en-US" smtClean="0"/>
               <a:t>Click to edit Master title style</a:t>
             </a:r>
+            <a:endParaRPr lang="en-US"/>
           </a:p>
         </p:txBody>
       </p:sp>
@@ -1892,7 +1892,7 @@
           <a:p>
             <a:fld id="{5BCAD085-E8A6-8845-BD4E-CB4CCA059FC4}" type="datetimeFigureOut">
               <a:rPr lang="en-US" smtClean="0"/>
-              <a:t>5/7/2026</a:t>
+              <a:t>1/27/13</a:t>
             </a:fld>
             <a:endParaRPr lang="en-US"/>
           </a:p>
@@ -1987,7 +1987,7 @@
           <a:p>
             <a:fld id="{5BCAD085-E8A6-8845-BD4E-CB4CCA059FC4}" type="datetimeFigureOut">
               <a:rPr lang="en-US" smtClean="0"/>
-              <a:t>5/7/2026</a:t>
+              <a:t>1/27/13</a:t>
             </a:fld>
             <a:endParaRPr lang="en-US"/>
           </a:p>
@@ -2090,9 +2090,10 @@
           </a:lstStyle>
           <a:p>
             <a:r>
-              <a:rPr lang="en-US"/>
+              <a:rPr lang="en-US" smtClean="0"/>
               <a:t>Click to edit Master title style</a:t>
             </a:r>
+            <a:endParaRPr lang="en-US"/>
           </a:p>
         </p:txBody>
       </p:sp>
@@ -2146,37 +2147,38 @@
           <a:p>
             <a:pPr lvl="0"/>
             <a:r>
-              <a:rPr lang="en-US"/>
+              <a:rPr lang="en-US" smtClean="0"/>
               <a:t>Click to edit Master text styles</a:t>
             </a:r>
           </a:p>
           <a:p>
             <a:pPr lvl="1"/>
             <a:r>
-              <a:rPr lang="en-US"/>
+              <a:rPr lang="en-US" smtClean="0"/>
               <a:t>Second level</a:t>
             </a:r>
           </a:p>
           <a:p>
             <a:pPr lvl="2"/>
             <a:r>
-              <a:rPr lang="en-US"/>
+              <a:rPr lang="en-US" smtClean="0"/>
               <a:t>Third level</a:t>
             </a:r>
           </a:p>
           <a:p>
             <a:pPr lvl="3"/>
             <a:r>
-              <a:rPr lang="en-US"/>
+              <a:rPr lang="en-US" smtClean="0"/>
               <a:t>Fourth level</a:t>
             </a:r>
           </a:p>
           <a:p>
             <a:pPr lvl="4"/>
             <a:r>
-              <a:rPr lang="en-US"/>
+              <a:rPr lang="en-US" smtClean="0"/>
               <a:t>Fifth level</a:t>
             </a:r>
+            <a:endParaRPr lang="en-US"/>
           </a:p>
         </p:txBody>
       </p:sp>
@@ -2239,7 +2241,7 @@
           <a:p>
             <a:pPr lvl="0"/>
             <a:r>
-              <a:rPr lang="en-US"/>
+              <a:rPr lang="en-US" smtClean="0"/>
               <a:t>Click to edit Master text styles</a:t>
             </a:r>
           </a:p>
@@ -2262,7 +2264,7 @@
           <a:p>
             <a:fld id="{5BCAD085-E8A6-8845-BD4E-CB4CCA059FC4}" type="datetimeFigureOut">
               <a:rPr lang="en-US" smtClean="0"/>
-              <a:t>5/7/2026</a:t>
+              <a:t>1/27/13</a:t>
             </a:fld>
             <a:endParaRPr lang="en-US"/>
           </a:p>
@@ -2365,9 +2367,10 @@
           </a:lstStyle>
           <a:p>
             <a:r>
-              <a:rPr lang="en-US"/>
+              <a:rPr lang="en-US" smtClean="0"/>
               <a:t>Click to edit Master title style</a:t>
             </a:r>
+            <a:endParaRPr lang="en-US"/>
           </a:p>
         </p:txBody>
       </p:sp>
@@ -2491,7 +2494,7 @@
           <a:p>
             <a:pPr lvl="0"/>
             <a:r>
-              <a:rPr lang="en-US"/>
+              <a:rPr lang="en-US" smtClean="0"/>
               <a:t>Click to edit Master text styles</a:t>
             </a:r>
           </a:p>
@@ -2514,7 +2517,7 @@
           <a:p>
             <a:fld id="{5BCAD085-E8A6-8845-BD4E-CB4CCA059FC4}" type="datetimeFigureOut">
               <a:rPr lang="en-US" smtClean="0"/>
-              <a:t>5/7/2026</a:t>
+              <a:t>1/27/13</a:t>
             </a:fld>
             <a:endParaRPr lang="en-US"/>
           </a:p>
@@ -2623,9 +2626,10 @@
           <a:lstStyle/>
           <a:p>
             <a:r>
-              <a:rPr lang="en-US"/>
+              <a:rPr lang="en-US" smtClean="0"/>
               <a:t>Click to edit Master title style</a:t>
             </a:r>
+            <a:endParaRPr lang="en-US"/>
           </a:p>
         </p:txBody>
       </p:sp>
@@ -2656,37 +2660,38 @@
           <a:p>
             <a:pPr lvl="0"/>
             <a:r>
-              <a:rPr lang="en-US"/>
+              <a:rPr lang="en-US" smtClean="0"/>
               <a:t>Click to edit Master text styles</a:t>
             </a:r>
           </a:p>
           <a:p>
             <a:pPr lvl="1"/>
             <a:r>
-              <a:rPr lang="en-US"/>
+              <a:rPr lang="en-US" smtClean="0"/>
               <a:t>Second level</a:t>
             </a:r>
           </a:p>
           <a:p>
             <a:pPr lvl="2"/>
             <a:r>
-              <a:rPr lang="en-US"/>
+              <a:rPr lang="en-US" smtClean="0"/>
               <a:t>Third level</a:t>
             </a:r>
           </a:p>
           <a:p>
             <a:pPr lvl="3"/>
             <a:r>
-              <a:rPr lang="en-US"/>
+              <a:rPr lang="en-US" smtClean="0"/>
               <a:t>Fourth level</a:t>
             </a:r>
           </a:p>
           <a:p>
             <a:pPr lvl="4"/>
             <a:r>
-              <a:rPr lang="en-US"/>
+              <a:rPr lang="en-US" smtClean="0"/>
               <a:t>Fifth level</a:t>
             </a:r>
+            <a:endParaRPr lang="en-US"/>
           </a:p>
         </p:txBody>
       </p:sp>
@@ -2725,7 +2730,7 @@
           <a:p>
             <a:fld id="{5BCAD085-E8A6-8845-BD4E-CB4CCA059FC4}" type="datetimeFigureOut">
               <a:rPr lang="en-US" smtClean="0"/>
-              <a:t>5/7/2026</a:t>
+              <a:t>1/27/13</a:t>
             </a:fld>
             <a:endParaRPr lang="en-US"/>
           </a:p>
@@ -3084,7 +3089,7 @@
 </file>
 
 <file path=ppt/slides/slide1.xml><?xml version="1.0" encoding="utf-8"?>
-<p:sld xmlns:a="http://schemas.openxmlformats.org/drawingml/2006/main" xmlns:r="http://schemas.openxmlformats.org/officeDocument/2006/relationships" xmlns:p="http://schemas.openxmlformats.org/presentationml/2006/main">
+<p:sld xmlns:a="http://schemas.openxmlformats.org/drawingml/2006/main" xmlns:p="http://schemas.openxmlformats.org/presentationml/2006/main" xmlns:r="http://schemas.openxmlformats.org/officeDocument/2006/relationships">
   <p:cSld>
     <p:spTree>
       <p:nvGrpSpPr>
@@ -3092,14 +3097,7 @@
         <p:cNvGrpSpPr/>
         <p:nvPr/>
       </p:nvGrpSpPr>
-      <p:grpSpPr>
-        <a:xfrm>
-          <a:off x="0" y="0"/>
-          <a:ext cx="0" cy="0"/>
-          <a:chOff x="0" y="0"/>
-          <a:chExt cx="0" cy="0"/>
-        </a:xfrm>
-      </p:grpSpPr>
+      <p:grpSpPr/>
       <p:sp>
         <p:nvSpPr>
           <p:cNvPr id="2" name="Rectangle 1"/>
@@ -3140,7 +3138,6 @@
           <a:lstStyle/>
           <a:p>
             <a:pPr algn="ctr"/>
-            <a:endParaRPr/>
           </a:p>
         </p:txBody>
       </p:sp>
@@ -3184,7 +3181,6 @@
           <a:lstStyle/>
           <a:p>
             <a:pPr algn="ctr"/>
-            <a:endParaRPr/>
           </a:p>
         </p:txBody>
       </p:sp>
@@ -3228,7 +3224,6 @@
           <a:lstStyle/>
           <a:p>
             <a:pPr algn="ctr"/>
-            <a:endParaRPr/>
           </a:p>
         </p:txBody>
       </p:sp>
@@ -3272,7 +3267,6 @@
           <a:lstStyle/>
           <a:p>
             <a:pPr algn="ctr"/>
-            <a:endParaRPr/>
           </a:p>
         </p:txBody>
       </p:sp>
@@ -3316,7 +3310,6 @@
           <a:lstStyle/>
           <a:p>
             <a:pPr algn="ctr"/>
-            <a:endParaRPr/>
           </a:p>
         </p:txBody>
       </p:sp>
@@ -3360,7 +3353,6 @@
           <a:lstStyle/>
           <a:p>
             <a:pPr algn="ctr"/>
-            <a:endParaRPr/>
           </a:p>
         </p:txBody>
       </p:sp>
@@ -3443,7 +3435,7 @@
 </file>
 
 <file path=ppt/slides/slide10.xml><?xml version="1.0" encoding="utf-8"?>
-<p:sld xmlns:a="http://schemas.openxmlformats.org/drawingml/2006/main" xmlns:r="http://schemas.openxmlformats.org/officeDocument/2006/relationships" xmlns:p="http://schemas.openxmlformats.org/presentationml/2006/main">
+<p:sld xmlns:a="http://schemas.openxmlformats.org/drawingml/2006/main" xmlns:p="http://schemas.openxmlformats.org/presentationml/2006/main" xmlns:r="http://schemas.openxmlformats.org/officeDocument/2006/relationships">
   <p:cSld>
     <p:spTree>
       <p:nvGrpSpPr>
@@ -3451,14 +3443,7 @@
         <p:cNvGrpSpPr/>
         <p:nvPr/>
       </p:nvGrpSpPr>
-      <p:grpSpPr>
-        <a:xfrm>
-          <a:off x="0" y="0"/>
-          <a:ext cx="0" cy="0"/>
-          <a:chOff x="0" y="0"/>
-          <a:chExt cx="0" cy="0"/>
-        </a:xfrm>
-      </p:grpSpPr>
+      <p:grpSpPr/>
       <p:sp>
         <p:nvSpPr>
           <p:cNvPr id="2" name="TextBox 1"/>
@@ -3534,7 +3519,6 @@
           <a:lstStyle/>
           <a:p>
             <a:pPr algn="ctr"/>
-            <a:endParaRPr/>
           </a:p>
         </p:txBody>
       </p:sp>
@@ -3578,7 +3562,6 @@
           <a:lstStyle/>
           <a:p>
             <a:pPr algn="ctr"/>
-            <a:endParaRPr/>
           </a:p>
         </p:txBody>
       </p:sp>
@@ -3676,7 +3659,7 @@
           </a:ln>
         </p:spPr>
         <p:txBody>
-          <a:bodyPr wrap="square" lIns="182880" tIns="137160" rIns="137160" bIns="91440">
+          <a:bodyPr wrap="square" lIns="182880" rIns="137160" tIns="137160" bIns="91440">
             <a:spAutoFit/>
           </a:bodyPr>
           <a:lstStyle/>
@@ -3923,7 +3906,6 @@
                 <a:latin typeface="Consolas"/>
               </a:defRPr>
             </a:pPr>
-            <a:endParaRPr/>
           </a:p>
           <a:p>
             <a:pPr>
@@ -4012,7 +3994,7 @@
           </a:ln>
         </p:spPr>
         <p:txBody>
-          <a:bodyPr wrap="square" lIns="182880" tIns="137160" rIns="137160" bIns="91440">
+          <a:bodyPr wrap="square" lIns="182880" rIns="137160" tIns="137160" bIns="91440">
             <a:spAutoFit/>
           </a:bodyPr>
           <a:lstStyle/>
@@ -4038,7 +4020,6 @@
                 <a:latin typeface="Consolas"/>
               </a:defRPr>
             </a:pPr>
-            <a:endParaRPr/>
           </a:p>
           <a:p>
             <a:pPr>
@@ -4192,7 +4173,6 @@
                 <a:latin typeface="Consolas"/>
               </a:defRPr>
             </a:pPr>
-            <a:endParaRPr/>
           </a:p>
           <a:p>
             <a:pPr>
@@ -4275,7 +4255,6 @@
           <a:lstStyle/>
           <a:p>
             <a:pPr algn="ctr"/>
-            <a:endParaRPr/>
           </a:p>
         </p:txBody>
       </p:sp>
@@ -4319,7 +4298,6 @@
           <a:lstStyle/>
           <a:p>
             <a:pPr algn="ctr"/>
-            <a:endParaRPr/>
           </a:p>
         </p:txBody>
       </p:sp>
@@ -4398,7 +4376,6 @@
           <a:lstStyle/>
           <a:p>
             <a:pPr algn="ctr"/>
-            <a:endParaRPr/>
           </a:p>
         </p:txBody>
       </p:sp>
@@ -4411,7 +4388,7 @@
 </file>
 
 <file path=ppt/slides/slide11.xml><?xml version="1.0" encoding="utf-8"?>
-<p:sld xmlns:a="http://schemas.openxmlformats.org/drawingml/2006/main" xmlns:r="http://schemas.openxmlformats.org/officeDocument/2006/relationships" xmlns:p="http://schemas.openxmlformats.org/presentationml/2006/main">
+<p:sld xmlns:a="http://schemas.openxmlformats.org/drawingml/2006/main" xmlns:p="http://schemas.openxmlformats.org/presentationml/2006/main" xmlns:r="http://schemas.openxmlformats.org/officeDocument/2006/relationships">
   <p:cSld>
     <p:spTree>
       <p:nvGrpSpPr>
@@ -4419,14 +4396,7 @@
         <p:cNvGrpSpPr/>
         <p:nvPr/>
       </p:nvGrpSpPr>
-      <p:grpSpPr>
-        <a:xfrm>
-          <a:off x="0" y="0"/>
-          <a:ext cx="0" cy="0"/>
-          <a:chOff x="0" y="0"/>
-          <a:chExt cx="0" cy="0"/>
-        </a:xfrm>
-      </p:grpSpPr>
+      <p:grpSpPr/>
       <p:sp>
         <p:nvSpPr>
           <p:cNvPr id="2" name="Rectangle 1"/>
@@ -4467,7 +4437,6 @@
           <a:lstStyle/>
           <a:p>
             <a:pPr algn="ctr"/>
-            <a:endParaRPr/>
           </a:p>
         </p:txBody>
       </p:sp>
@@ -4511,7 +4480,6 @@
           <a:lstStyle/>
           <a:p>
             <a:pPr algn="ctr"/>
-            <a:endParaRPr/>
           </a:p>
         </p:txBody>
       </p:sp>
@@ -4555,7 +4523,6 @@
           <a:lstStyle/>
           <a:p>
             <a:pPr algn="ctr"/>
-            <a:endParaRPr/>
           </a:p>
         </p:txBody>
       </p:sp>
@@ -4599,7 +4566,6 @@
           <a:lstStyle/>
           <a:p>
             <a:pPr algn="ctr"/>
-            <a:endParaRPr/>
           </a:p>
         </p:txBody>
       </p:sp>
@@ -4643,7 +4609,6 @@
           <a:lstStyle/>
           <a:p>
             <a:pPr algn="ctr"/>
-            <a:endParaRPr/>
           </a:p>
         </p:txBody>
       </p:sp>
@@ -4687,7 +4652,6 @@
           <a:lstStyle/>
           <a:p>
             <a:pPr algn="ctr"/>
-            <a:endParaRPr/>
           </a:p>
         </p:txBody>
       </p:sp>
@@ -4770,7 +4734,7 @@
 </file>
 
 <file path=ppt/slides/slide2.xml><?xml version="1.0" encoding="utf-8"?>
-<p:sld xmlns:a="http://schemas.openxmlformats.org/drawingml/2006/main" xmlns:r="http://schemas.openxmlformats.org/officeDocument/2006/relationships" xmlns:p="http://schemas.openxmlformats.org/presentationml/2006/main">
+<p:sld xmlns:a="http://schemas.openxmlformats.org/drawingml/2006/main" xmlns:p="http://schemas.openxmlformats.org/presentationml/2006/main" xmlns:r="http://schemas.openxmlformats.org/officeDocument/2006/relationships">
   <p:cSld>
     <p:spTree>
       <p:nvGrpSpPr>
@@ -4778,14 +4742,7 @@
         <p:cNvGrpSpPr/>
         <p:nvPr/>
       </p:nvGrpSpPr>
-      <p:grpSpPr>
-        <a:xfrm>
-          <a:off x="0" y="0"/>
-          <a:ext cx="0" cy="0"/>
-          <a:chOff x="0" y="0"/>
-          <a:chExt cx="0" cy="0"/>
-        </a:xfrm>
-      </p:grpSpPr>
+      <p:grpSpPr/>
       <p:sp>
         <p:nvSpPr>
           <p:cNvPr id="2" name="TextBox 1"/>
@@ -4861,7 +4818,6 @@
           <a:lstStyle/>
           <a:p>
             <a:pPr algn="ctr"/>
-            <a:endParaRPr/>
           </a:p>
         </p:txBody>
       </p:sp>
@@ -4905,7 +4861,6 @@
           <a:lstStyle/>
           <a:p>
             <a:pPr algn="ctr"/>
-            <a:endParaRPr/>
           </a:p>
         </p:txBody>
       </p:sp>
@@ -5077,7 +5032,6 @@
           <a:lstStyle/>
           <a:p>
             <a:pPr algn="ctr"/>
-            <a:endParaRPr/>
           </a:p>
         </p:txBody>
       </p:sp>
@@ -5121,7 +5075,6 @@
           <a:lstStyle/>
           <a:p>
             <a:pPr algn="ctr"/>
-            <a:endParaRPr/>
           </a:p>
         </p:txBody>
       </p:sp>
@@ -5200,7 +5153,6 @@
           <a:lstStyle/>
           <a:p>
             <a:pPr algn="ctr"/>
-            <a:endParaRPr/>
           </a:p>
         </p:txBody>
       </p:sp>
@@ -5213,7 +5165,7 @@
 </file>
 
 <file path=ppt/slides/slide3.xml><?xml version="1.0" encoding="utf-8"?>
-<p:sld xmlns:a="http://schemas.openxmlformats.org/drawingml/2006/main" xmlns:r="http://schemas.openxmlformats.org/officeDocument/2006/relationships" xmlns:p="http://schemas.openxmlformats.org/presentationml/2006/main">
+<p:sld xmlns:a="http://schemas.openxmlformats.org/drawingml/2006/main" xmlns:p="http://schemas.openxmlformats.org/presentationml/2006/main" xmlns:r="http://schemas.openxmlformats.org/officeDocument/2006/relationships">
   <p:cSld>
     <p:spTree>
       <p:nvGrpSpPr>
@@ -5221,14 +5173,7 @@
         <p:cNvGrpSpPr/>
         <p:nvPr/>
       </p:nvGrpSpPr>
-      <p:grpSpPr>
-        <a:xfrm>
-          <a:off x="0" y="0"/>
-          <a:ext cx="0" cy="0"/>
-          <a:chOff x="0" y="0"/>
-          <a:chExt cx="0" cy="0"/>
-        </a:xfrm>
-      </p:grpSpPr>
+      <p:grpSpPr/>
       <p:sp>
         <p:nvSpPr>
           <p:cNvPr id="2" name="TextBox 1"/>
@@ -5304,7 +5249,6 @@
           <a:lstStyle/>
           <a:p>
             <a:pPr algn="ctr"/>
-            <a:endParaRPr/>
           </a:p>
         </p:txBody>
       </p:sp>
@@ -5348,7 +5292,6 @@
           <a:lstStyle/>
           <a:p>
             <a:pPr algn="ctr"/>
-            <a:endParaRPr/>
           </a:p>
         </p:txBody>
       </p:sp>
@@ -5475,7 +5418,6 @@
           <a:lstStyle/>
           <a:p>
             <a:pPr algn="ctr"/>
-            <a:endParaRPr/>
           </a:p>
         </p:txBody>
       </p:sp>
@@ -5519,7 +5461,6 @@
           <a:lstStyle/>
           <a:p>
             <a:pPr algn="ctr"/>
-            <a:endParaRPr/>
           </a:p>
         </p:txBody>
       </p:sp>
@@ -5598,7 +5539,6 @@
           <a:lstStyle/>
           <a:p>
             <a:pPr algn="ctr"/>
-            <a:endParaRPr/>
           </a:p>
         </p:txBody>
       </p:sp>
@@ -5611,7 +5551,7 @@
 </file>
 
 <file path=ppt/slides/slide4.xml><?xml version="1.0" encoding="utf-8"?>
-<p:sld xmlns:a="http://schemas.openxmlformats.org/drawingml/2006/main" xmlns:r="http://schemas.openxmlformats.org/officeDocument/2006/relationships" xmlns:p="http://schemas.openxmlformats.org/presentationml/2006/main">
+<p:sld xmlns:a="http://schemas.openxmlformats.org/drawingml/2006/main" xmlns:p="http://schemas.openxmlformats.org/presentationml/2006/main" xmlns:r="http://schemas.openxmlformats.org/officeDocument/2006/relationships">
   <p:cSld>
     <p:spTree>
       <p:nvGrpSpPr>
@@ -5619,14 +5559,7 @@
         <p:cNvGrpSpPr/>
         <p:nvPr/>
       </p:nvGrpSpPr>
-      <p:grpSpPr>
-        <a:xfrm>
-          <a:off x="0" y="0"/>
-          <a:ext cx="0" cy="0"/>
-          <a:chOff x="0" y="0"/>
-          <a:chExt cx="0" cy="0"/>
-        </a:xfrm>
-      </p:grpSpPr>
+      <p:grpSpPr/>
       <p:sp>
         <p:nvSpPr>
           <p:cNvPr id="2" name="TextBox 1"/>
@@ -5702,7 +5635,6 @@
           <a:lstStyle/>
           <a:p>
             <a:pPr algn="ctr"/>
-            <a:endParaRPr/>
           </a:p>
         </p:txBody>
       </p:sp>
@@ -5746,7 +5678,6 @@
           <a:lstStyle/>
           <a:p>
             <a:pPr algn="ctr"/>
-            <a:endParaRPr/>
           </a:p>
         </p:txBody>
       </p:sp>
@@ -5790,7 +5721,6 @@
           <a:lstStyle/>
           <a:p>
             <a:pPr algn="ctr"/>
-            <a:endParaRPr/>
           </a:p>
         </p:txBody>
       </p:sp>
@@ -5818,7 +5748,7 @@
           </a:ln>
         </p:spPr>
         <p:txBody>
-          <a:bodyPr wrap="square" lIns="274320" tIns="182880" rIns="182880" bIns="137160">
+          <a:bodyPr wrap="square" lIns="274320" rIns="182880" tIns="182880" bIns="137160">
             <a:spAutoFit/>
           </a:bodyPr>
           <a:lstStyle/>
@@ -6072,7 +6002,6 @@
           <a:lstStyle/>
           <a:p>
             <a:pPr algn="ctr"/>
-            <a:endParaRPr/>
           </a:p>
         </p:txBody>
       </p:sp>
@@ -6116,7 +6045,6 @@
           <a:lstStyle/>
           <a:p>
             <a:pPr algn="ctr"/>
-            <a:endParaRPr/>
           </a:p>
         </p:txBody>
       </p:sp>
@@ -6195,7 +6123,6 @@
           <a:lstStyle/>
           <a:p>
             <a:pPr algn="ctr"/>
-            <a:endParaRPr/>
           </a:p>
         </p:txBody>
       </p:sp>
@@ -6208,7 +6135,7 @@
 </file>
 
 <file path=ppt/slides/slide5.xml><?xml version="1.0" encoding="utf-8"?>
-<p:sld xmlns:a="http://schemas.openxmlformats.org/drawingml/2006/main" xmlns:r="http://schemas.openxmlformats.org/officeDocument/2006/relationships" xmlns:p="http://schemas.openxmlformats.org/presentationml/2006/main">
+<p:sld xmlns:a="http://schemas.openxmlformats.org/drawingml/2006/main" xmlns:p="http://schemas.openxmlformats.org/presentationml/2006/main" xmlns:r="http://schemas.openxmlformats.org/officeDocument/2006/relationships">
   <p:cSld>
     <p:spTree>
       <p:nvGrpSpPr>
@@ -6216,14 +6143,7 @@
         <p:cNvGrpSpPr/>
         <p:nvPr/>
       </p:nvGrpSpPr>
-      <p:grpSpPr>
-        <a:xfrm>
-          <a:off x="0" y="0"/>
-          <a:ext cx="0" cy="0"/>
-          <a:chOff x="0" y="0"/>
-          <a:chExt cx="0" cy="0"/>
-        </a:xfrm>
-      </p:grpSpPr>
+      <p:grpSpPr/>
       <p:sp>
         <p:nvSpPr>
           <p:cNvPr id="2" name="TextBox 1"/>
@@ -6299,7 +6219,6 @@
           <a:lstStyle/>
           <a:p>
             <a:pPr algn="ctr"/>
-            <a:endParaRPr/>
           </a:p>
         </p:txBody>
       </p:sp>
@@ -6343,7 +6262,6 @@
           <a:lstStyle/>
           <a:p>
             <a:pPr algn="ctr"/>
-            <a:endParaRPr/>
           </a:p>
         </p:txBody>
       </p:sp>
@@ -6356,7 +6274,7 @@
         <p:spPr>
           <a:xfrm>
             <a:off x="548640" y="1463040"/>
-            <a:ext cx="10972800" cy="3503523"/>
+            <a:ext cx="10972800" cy="4937760"/>
           </a:xfrm>
           <a:prstGeom prst="rect">
             <a:avLst/>
@@ -6380,16 +6298,7 @@
               </a:defRPr>
             </a:pPr>
             <a:r>
-              <a:rPr dirty="0"/>
-              <a:t>Client paging — /</a:t>
-            </a:r>
-            <a:r>
-              <a:rPr dirty="0" err="1"/>
-              <a:t>todos</a:t>
-            </a:r>
-            <a:r>
-              <a:rPr dirty="0"/>
-              <a:t>-client</a:t>
+              <a:t>Client paging — /todos-client</a:t>
             </a:r>
           </a:p>
           <a:p>
@@ -6404,7 +6313,6 @@
               </a:defRPr>
             </a:pPr>
             <a:r>
-              <a:rPr dirty="0"/>
               <a:t>Fetches the full list once; browser handles paging, sorting, column-filtering</a:t>
             </a:r>
           </a:p>
@@ -6420,7 +6328,6 @@
               </a:defRPr>
             </a:pPr>
             <a:r>
-              <a:rPr dirty="0"/>
               <a:t>Global search hits the server with ?q=... (full-dataset search)</a:t>
             </a:r>
           </a:p>
@@ -6436,7 +6343,6 @@
               </a:defRPr>
             </a:pPr>
             <a:r>
-              <a:rPr dirty="0"/>
               <a:t>Pros: instant interactions after load; simple to implement</a:t>
             </a:r>
           </a:p>
@@ -6452,30 +6358,7 @@
               </a:defRPr>
             </a:pPr>
             <a:r>
-              <a:rPr dirty="0"/>
-              <a:t>Cons: initial fetch grows with the dataset; not viable for </a:t>
-            </a:r>
-            <a:r>
-              <a:rPr lang="en-US" dirty="0"/>
-              <a:t>large</a:t>
-            </a:r>
-            <a:r>
-              <a:rPr dirty="0"/>
-              <a:t> </a:t>
-            </a:r>
-            <a:r>
-              <a:t>prod</a:t>
-            </a:r>
-            <a:r>
-              <a:rPr lang="en-US"/>
-              <a:t>uction</a:t>
-            </a:r>
-            <a:r>
-              <a:t> </a:t>
-            </a:r>
-            <a:r>
-              <a:rPr dirty="0"/>
-              <a:t>volume</a:t>
+              <a:t>Cons: initial fetch grows with the dataset; not viable for large production volume</a:t>
             </a:r>
           </a:p>
           <a:p>
@@ -6489,7 +6372,6 @@
                 </a:solidFill>
               </a:defRPr>
             </a:pPr>
-            <a:endParaRPr dirty="0"/>
           </a:p>
           <a:p>
             <a:pPr>
@@ -6503,16 +6385,7 @@
               </a:defRPr>
             </a:pPr>
             <a:r>
-              <a:rPr dirty="0"/>
-              <a:t>Server paging — /</a:t>
-            </a:r>
-            <a:r>
-              <a:rPr dirty="0" err="1"/>
-              <a:t>todos</a:t>
-            </a:r>
-            <a:r>
-              <a:rPr dirty="0"/>
-              <a:t>-server</a:t>
+              <a:t>Server paging — /todos-server</a:t>
             </a:r>
           </a:p>
           <a:p>
@@ -6527,12 +6400,7 @@
               </a:defRPr>
             </a:pPr>
             <a:r>
-              <a:rPr dirty="0" err="1"/>
-              <a:t>DataTable</a:t>
-            </a:r>
-            <a:r>
-              <a:rPr dirty="0"/>
-              <a:t> in lazy mode; each new page/sort/filter/search → one request</a:t>
+              <a:t>DataTable in lazy mode; each new page/sort/filter/search → one request</a:t>
             </a:r>
           </a:p>
           <a:p>
@@ -6547,12 +6415,7 @@
               </a:defRPr>
             </a:pPr>
             <a:r>
-              <a:rPr dirty="0" err="1"/>
-              <a:t>TanStack</a:t>
-            </a:r>
-            <a:r>
-              <a:rPr dirty="0"/>
-              <a:t> Query caches repeats; revisits are served from cache</a:t>
+              <a:t>TanStack Query caches repeats; revisits are served from cache</a:t>
             </a:r>
           </a:p>
           <a:p>
@@ -6567,7 +6430,6 @@
               </a:defRPr>
             </a:pPr>
             <a:r>
-              <a:rPr dirty="0"/>
               <a:t>Pros: scales to millions of rows; always fresh; low client memory</a:t>
             </a:r>
           </a:p>
@@ -6583,7 +6445,6 @@
               </a:defRPr>
             </a:pPr>
             <a:r>
-              <a:rPr dirty="0"/>
               <a:t>Cons: more upfront wiring — server must support paging + filter + sort params</a:t>
             </a:r>
           </a:p>
@@ -6629,7 +6490,6 @@
           <a:lstStyle/>
           <a:p>
             <a:pPr algn="ctr"/>
-            <a:endParaRPr/>
           </a:p>
         </p:txBody>
       </p:sp>
@@ -6673,7 +6533,6 @@
           <a:lstStyle/>
           <a:p>
             <a:pPr algn="ctr"/>
-            <a:endParaRPr/>
           </a:p>
         </p:txBody>
       </p:sp>
@@ -6752,7 +6611,6 @@
           <a:lstStyle/>
           <a:p>
             <a:pPr algn="ctr"/>
-            <a:endParaRPr/>
           </a:p>
         </p:txBody>
       </p:sp>
@@ -6765,7 +6623,7 @@
 </file>
 
 <file path=ppt/slides/slide6.xml><?xml version="1.0" encoding="utf-8"?>
-<p:sld xmlns:a="http://schemas.openxmlformats.org/drawingml/2006/main" xmlns:r="http://schemas.openxmlformats.org/officeDocument/2006/relationships" xmlns:p="http://schemas.openxmlformats.org/presentationml/2006/main">
+<p:sld xmlns:a="http://schemas.openxmlformats.org/drawingml/2006/main" xmlns:p="http://schemas.openxmlformats.org/presentationml/2006/main" xmlns:r="http://schemas.openxmlformats.org/officeDocument/2006/relationships">
   <p:cSld>
     <p:spTree>
       <p:nvGrpSpPr>
@@ -6773,14 +6631,7 @@
         <p:cNvGrpSpPr/>
         <p:nvPr/>
       </p:nvGrpSpPr>
-      <p:grpSpPr>
-        <a:xfrm>
-          <a:off x="0" y="0"/>
-          <a:ext cx="0" cy="0"/>
-          <a:chOff x="0" y="0"/>
-          <a:chExt cx="0" cy="0"/>
-        </a:xfrm>
-      </p:grpSpPr>
+      <p:grpSpPr/>
       <p:sp>
         <p:nvSpPr>
           <p:cNvPr id="2" name="TextBox 1"/>
@@ -6856,7 +6707,6 @@
           <a:lstStyle/>
           <a:p>
             <a:pPr algn="ctr"/>
-            <a:endParaRPr/>
           </a:p>
         </p:txBody>
       </p:sp>
@@ -6900,7 +6750,6 @@
           <a:lstStyle/>
           <a:p>
             <a:pPr algn="ctr"/>
-            <a:endParaRPr/>
           </a:p>
         </p:txBody>
       </p:sp>
@@ -6948,7 +6797,7 @@
         <p:spPr>
           <a:xfrm>
             <a:off x="548640" y="1737360"/>
-            <a:ext cx="73152" cy="1737360"/>
+            <a:ext cx="73152" cy="1828800"/>
           </a:xfrm>
           <a:prstGeom prst="rect">
             <a:avLst/>
@@ -6979,7 +6828,6 @@
           <a:lstStyle/>
           <a:p>
             <a:pPr algn="ctr"/>
-            <a:endParaRPr/>
           </a:p>
         </p:txBody>
       </p:sp>
@@ -6992,7 +6840,7 @@
         <p:spPr>
           <a:xfrm>
             <a:off x="548640" y="1737360"/>
-            <a:ext cx="10972800" cy="1737360"/>
+            <a:ext cx="10972800" cy="1828800"/>
           </a:xfrm>
           <a:prstGeom prst="rect">
             <a:avLst/>
@@ -7007,7 +6855,7 @@
           </a:ln>
         </p:spPr>
         <p:txBody>
-          <a:bodyPr wrap="square" lIns="274320" tIns="182880" rIns="182880" bIns="137160">
+          <a:bodyPr wrap="square" lIns="274320" rIns="182880" tIns="182880" bIns="137160">
             <a:spAutoFit/>
           </a:bodyPr>
           <a:lstStyle/>
@@ -7016,7 +6864,7 @@
               <a:spcAft>
                 <a:spcPts val="200"/>
               </a:spcAft>
-              <a:defRPr sz="1600">
+              <a:defRPr sz="1300">
                 <a:solidFill>
                   <a:srgbClr val="1B2631"/>
                 </a:solidFill>
@@ -7032,7 +6880,7 @@
               <a:spcAft>
                 <a:spcPts val="200"/>
               </a:spcAft>
-              <a:defRPr sz="1600">
+              <a:defRPr sz="1300">
                 <a:solidFill>
                   <a:srgbClr val="1B2631"/>
                 </a:solidFill>
@@ -7048,7 +6896,7 @@
               <a:spcAft>
                 <a:spcPts val="200"/>
               </a:spcAft>
-              <a:defRPr sz="1600">
+              <a:defRPr sz="1300">
                 <a:solidFill>
                   <a:srgbClr val="1B2631"/>
                 </a:solidFill>
@@ -7064,7 +6912,7 @@
               <a:spcAft>
                 <a:spcPts val="200"/>
               </a:spcAft>
-              <a:defRPr sz="1600">
+              <a:defRPr sz="1300">
                 <a:solidFill>
                   <a:srgbClr val="1B2631"/>
                 </a:solidFill>
@@ -7080,7 +6928,7 @@
               <a:spcAft>
                 <a:spcPts val="200"/>
               </a:spcAft>
-              <a:defRPr sz="1600">
+              <a:defRPr sz="1300">
                 <a:solidFill>
                   <a:srgbClr val="1B2631"/>
                 </a:solidFill>
@@ -7096,7 +6944,7 @@
               <a:spcAft>
                 <a:spcPts val="200"/>
               </a:spcAft>
-              <a:defRPr sz="1600">
+              <a:defRPr sz="1300">
                 <a:solidFill>
                   <a:srgbClr val="1B2631"/>
                 </a:solidFill>
@@ -7112,7 +6960,7 @@
               <a:spcAft>
                 <a:spcPts val="200"/>
               </a:spcAft>
-              <a:defRPr sz="1600">
+              <a:defRPr sz="1300">
                 <a:solidFill>
                   <a:srgbClr val="1B2631"/>
                 </a:solidFill>
@@ -7133,7 +6981,7 @@
         </p:nvSpPr>
         <p:spPr>
           <a:xfrm>
-            <a:off x="548640" y="3657600"/>
+            <a:off x="548640" y="3749039"/>
             <a:ext cx="10972800" cy="4937760"/>
           </a:xfrm>
           <a:prstGeom prst="rect">
@@ -7151,7 +6999,7 @@
               <a:spcAft>
                 <a:spcPts val="800"/>
               </a:spcAft>
-              <a:defRPr sz="1400">
+              <a:defRPr sz="1200">
                 <a:solidFill>
                   <a:srgbClr val="1B2631"/>
                 </a:solidFill>
@@ -7166,7 +7014,7 @@
               <a:spcAft>
                 <a:spcPts val="800"/>
               </a:spcAft>
-              <a:defRPr sz="1400">
+              <a:defRPr sz="1200">
                 <a:solidFill>
                   <a:srgbClr val="1B2631"/>
                 </a:solidFill>
@@ -7181,7 +7029,7 @@
               <a:spcAft>
                 <a:spcPts val="800"/>
               </a:spcAft>
-              <a:defRPr sz="1400">
+              <a:defRPr sz="1200">
                 <a:solidFill>
                   <a:srgbClr val="1B2631"/>
                 </a:solidFill>
@@ -7196,7 +7044,7 @@
               <a:spcAft>
                 <a:spcPts val="800"/>
               </a:spcAft>
-              <a:defRPr sz="1400">
+              <a:defRPr sz="1200">
                 <a:solidFill>
                   <a:srgbClr val="1B2631"/>
                 </a:solidFill>
@@ -7211,7 +7059,7 @@
               <a:spcAft>
                 <a:spcPts val="800"/>
               </a:spcAft>
-              <a:defRPr sz="1400">
+              <a:defRPr sz="1200">
                 <a:solidFill>
                   <a:srgbClr val="1B2631"/>
                 </a:solidFill>
@@ -7226,7 +7074,7 @@
               <a:spcAft>
                 <a:spcPts val="800"/>
               </a:spcAft>
-              <a:defRPr sz="1400">
+              <a:defRPr sz="1200">
                 <a:solidFill>
                   <a:srgbClr val="1B2631"/>
                 </a:solidFill>
@@ -7241,7 +7089,7 @@
               <a:spcAft>
                 <a:spcPts val="800"/>
               </a:spcAft>
-              <a:defRPr sz="1400">
+              <a:defRPr sz="1200">
                 <a:solidFill>
                   <a:srgbClr val="1B2631"/>
                 </a:solidFill>
@@ -7256,7 +7104,7 @@
               <a:spcAft>
                 <a:spcPts val="800"/>
               </a:spcAft>
-              <a:defRPr sz="1400">
+              <a:defRPr sz="1200">
                 <a:solidFill>
                   <a:srgbClr val="1B2631"/>
                 </a:solidFill>
@@ -7308,7 +7156,6 @@
           <a:lstStyle/>
           <a:p>
             <a:pPr algn="ctr"/>
-            <a:endParaRPr/>
           </a:p>
         </p:txBody>
       </p:sp>
@@ -7352,7 +7199,6 @@
           <a:lstStyle/>
           <a:p>
             <a:pPr algn="ctr"/>
-            <a:endParaRPr/>
           </a:p>
         </p:txBody>
       </p:sp>
@@ -7431,7 +7277,6 @@
           <a:lstStyle/>
           <a:p>
             <a:pPr algn="ctr"/>
-            <a:endParaRPr/>
           </a:p>
         </p:txBody>
       </p:sp>
@@ -7444,7 +7289,7 @@
 </file>
 
 <file path=ppt/slides/slide7.xml><?xml version="1.0" encoding="utf-8"?>
-<p:sld xmlns:a="http://schemas.openxmlformats.org/drawingml/2006/main" xmlns:r="http://schemas.openxmlformats.org/officeDocument/2006/relationships" xmlns:p="http://schemas.openxmlformats.org/presentationml/2006/main">
+<p:sld xmlns:a="http://schemas.openxmlformats.org/drawingml/2006/main" xmlns:p="http://schemas.openxmlformats.org/presentationml/2006/main" xmlns:r="http://schemas.openxmlformats.org/officeDocument/2006/relationships">
   <p:cSld>
     <p:spTree>
       <p:nvGrpSpPr>
@@ -7452,14 +7297,7 @@
         <p:cNvGrpSpPr/>
         <p:nvPr/>
       </p:nvGrpSpPr>
-      <p:grpSpPr>
-        <a:xfrm>
-          <a:off x="0" y="0"/>
-          <a:ext cx="0" cy="0"/>
-          <a:chOff x="0" y="0"/>
-          <a:chExt cx="0" cy="0"/>
-        </a:xfrm>
-      </p:grpSpPr>
+      <p:grpSpPr/>
       <p:sp>
         <p:nvSpPr>
           <p:cNvPr id="2" name="TextBox 1"/>
@@ -7535,7 +7373,6 @@
           <a:lstStyle/>
           <a:p>
             <a:pPr algn="ctr"/>
-            <a:endParaRPr/>
           </a:p>
         </p:txBody>
       </p:sp>
@@ -7579,7 +7416,6 @@
           <a:lstStyle/>
           <a:p>
             <a:pPr algn="ctr"/>
-            <a:endParaRPr/>
           </a:p>
         </p:txBody>
       </p:sp>
@@ -7710,7 +7546,6 @@
                 </a:solidFill>
               </a:defRPr>
             </a:pPr>
-            <a:endParaRPr/>
           </a:p>
           <a:p>
             <a:pPr>
@@ -7769,7 +7604,6 @@
           <a:lstStyle/>
           <a:p>
             <a:pPr algn="ctr"/>
-            <a:endParaRPr/>
           </a:p>
         </p:txBody>
       </p:sp>
@@ -7813,7 +7647,6 @@
           <a:lstStyle/>
           <a:p>
             <a:pPr algn="ctr"/>
-            <a:endParaRPr/>
           </a:p>
         </p:txBody>
       </p:sp>
@@ -7892,7 +7725,6 @@
           <a:lstStyle/>
           <a:p>
             <a:pPr algn="ctr"/>
-            <a:endParaRPr/>
           </a:p>
         </p:txBody>
       </p:sp>
@@ -7905,7 +7737,7 @@
 </file>
 
 <file path=ppt/slides/slide8.xml><?xml version="1.0" encoding="utf-8"?>
-<p:sld xmlns:a="http://schemas.openxmlformats.org/drawingml/2006/main" xmlns:r="http://schemas.openxmlformats.org/officeDocument/2006/relationships" xmlns:p="http://schemas.openxmlformats.org/presentationml/2006/main">
+<p:sld xmlns:a="http://schemas.openxmlformats.org/drawingml/2006/main" xmlns:p="http://schemas.openxmlformats.org/presentationml/2006/main" xmlns:r="http://schemas.openxmlformats.org/officeDocument/2006/relationships">
   <p:cSld>
     <p:spTree>
       <p:nvGrpSpPr>
@@ -7913,14 +7745,7 @@
         <p:cNvGrpSpPr/>
         <p:nvPr/>
       </p:nvGrpSpPr>
-      <p:grpSpPr>
-        <a:xfrm>
-          <a:off x="0" y="0"/>
-          <a:ext cx="0" cy="0"/>
-          <a:chOff x="0" y="0"/>
-          <a:chExt cx="0" cy="0"/>
-        </a:xfrm>
-      </p:grpSpPr>
+      <p:grpSpPr/>
       <p:sp>
         <p:nvSpPr>
           <p:cNvPr id="2" name="TextBox 1"/>
@@ -7996,7 +7821,6 @@
           <a:lstStyle/>
           <a:p>
             <a:pPr algn="ctr"/>
-            <a:endParaRPr/>
           </a:p>
         </p:txBody>
       </p:sp>
@@ -8040,7 +7864,6 @@
           <a:lstStyle/>
           <a:p>
             <a:pPr algn="ctr"/>
-            <a:endParaRPr/>
           </a:p>
         </p:txBody>
       </p:sp>
@@ -8119,7 +7942,6 @@
           <a:lstStyle/>
           <a:p>
             <a:pPr algn="ctr"/>
-            <a:endParaRPr/>
           </a:p>
         </p:txBody>
       </p:sp>
@@ -8147,7 +7969,7 @@
           </a:ln>
         </p:spPr>
         <p:txBody>
-          <a:bodyPr wrap="square" lIns="274320" tIns="182880" rIns="182880" bIns="137160">
+          <a:bodyPr wrap="square" lIns="274320" rIns="182880" tIns="182880" bIns="137160">
             <a:spAutoFit/>
           </a:bodyPr>
           <a:lstStyle/>
@@ -8354,7 +8176,6 @@
           <a:lstStyle/>
           <a:p>
             <a:pPr algn="ctr"/>
-            <a:endParaRPr/>
           </a:p>
         </p:txBody>
       </p:sp>
@@ -8398,7 +8219,6 @@
           <a:lstStyle/>
           <a:p>
             <a:pPr algn="ctr"/>
-            <a:endParaRPr/>
           </a:p>
         </p:txBody>
       </p:sp>
@@ -8477,7 +8297,6 @@
           <a:lstStyle/>
           <a:p>
             <a:pPr algn="ctr"/>
-            <a:endParaRPr/>
           </a:p>
         </p:txBody>
       </p:sp>
@@ -8490,7 +8309,7 @@
 </file>
 
 <file path=ppt/slides/slide9.xml><?xml version="1.0" encoding="utf-8"?>
-<p:sld xmlns:a="http://schemas.openxmlformats.org/drawingml/2006/main" xmlns:r="http://schemas.openxmlformats.org/officeDocument/2006/relationships" xmlns:p="http://schemas.openxmlformats.org/presentationml/2006/main">
+<p:sld xmlns:a="http://schemas.openxmlformats.org/drawingml/2006/main" xmlns:p="http://schemas.openxmlformats.org/presentationml/2006/main" xmlns:r="http://schemas.openxmlformats.org/officeDocument/2006/relationships">
   <p:cSld>
     <p:spTree>
       <p:nvGrpSpPr>
@@ -8498,14 +8317,7 @@
         <p:cNvGrpSpPr/>
         <p:nvPr/>
       </p:nvGrpSpPr>
-      <p:grpSpPr>
-        <a:xfrm>
-          <a:off x="0" y="0"/>
-          <a:ext cx="0" cy="0"/>
-          <a:chOff x="0" y="0"/>
-          <a:chExt cx="0" cy="0"/>
-        </a:xfrm>
-      </p:grpSpPr>
+      <p:grpSpPr/>
       <p:sp>
         <p:nvSpPr>
           <p:cNvPr id="2" name="TextBox 1"/>
@@ -8581,7 +8393,6 @@
           <a:lstStyle/>
           <a:p>
             <a:pPr algn="ctr"/>
-            <a:endParaRPr/>
           </a:p>
         </p:txBody>
       </p:sp>
@@ -8625,7 +8436,6 @@
           <a:lstStyle/>
           <a:p>
             <a:pPr algn="ctr"/>
-            <a:endParaRPr/>
           </a:p>
         </p:txBody>
       </p:sp>
@@ -8706,7 +8516,6 @@
                 </a:solidFill>
               </a:defRPr>
             </a:pPr>
-            <a:endParaRPr/>
           </a:p>
           <a:p>
             <a:pPr>
@@ -8764,7 +8573,6 @@
                 </a:solidFill>
               </a:defRPr>
             </a:pPr>
-            <a:endParaRPr/>
           </a:p>
           <a:p>
             <a:pPr>
@@ -8823,7 +8631,6 @@
           <a:lstStyle/>
           <a:p>
             <a:pPr algn="ctr"/>
-            <a:endParaRPr/>
           </a:p>
         </p:txBody>
       </p:sp>
@@ -8867,7 +8674,6 @@
           <a:lstStyle/>
           <a:p>
             <a:pPr algn="ctr"/>
-            <a:endParaRPr/>
           </a:p>
         </p:txBody>
       </p:sp>
@@ -8946,7 +8752,6 @@
           <a:lstStyle/>
           <a:p>
             <a:pPr algn="ctr"/>
-            <a:endParaRPr/>
           </a:p>
         </p:txBody>
       </p:sp>
